--- a/livrables/Workshop2026-B4-G7-pres.pptx
+++ b/livrables/Workshop2026-B4-G7-pres.pptx
@@ -19,9 +19,10 @@
     <p:sldId id="267" r:id="rId13"/>
     <p:sldId id="268" r:id="rId14"/>
     <p:sldId id="269" r:id="rId15"/>
+    <p:sldId id="270" r:id="rId16"/>
   </p:sldIdLst>
   <p:notesMasterIdLst>
-    <p:notesMasterId r:id="rId16"/>
+    <p:notesMasterId r:id="rId17"/>
   </p:notesMasterIdLst>
   <p:sldSz cx="12192000" cy="6858000"/>
   <p:notesSz cx="6858000" cy="12192000"/>
@@ -120,20 +121,20 @@
   <p:extLst>
     <p:ext uri="{521415D9-36F7-43E2-AB2F-B90AF26B5E84}">
       <p14:sectionLst xmlns:p14="http://schemas.microsoft.com/office/powerpoint/2010/main">
-        <p14:section name="Ouverture" id="{eddcc7d7-82be-63e3-886e-60fc8c79a5da}">
+        <p14:section name="Ouverture" id="{5cdc812e-98b4-3007-ec25-7c646111b36f}">
           <p14:sldIdLst>
             <p14:sldId id="256"/>
             <p14:sldId id="257"/>
             <p14:sldId id="258"/>
           </p14:sldIdLst>
         </p14:section>
-        <p14:section name="Teaser et démo" id="{e7cb9d16-4dbb-13ec-6a87-24029e60f2c6}">
+        <p14:section name="Teaser et démo" id="{a990ec60-738e-aba7-0347-f15859776c93}">
           <p14:sldIdLst>
             <p14:sldId id="259"/>
             <p14:sldId id="260"/>
           </p14:sldIdLst>
         </p14:section>
-        <p14:section name="Pitch technique" id="{56d32da3-89c9-8e55-7f00-5befd7a135ec}">
+        <p14:section name="Pitch technique" id="{71a6ad8e-8f39-a75c-3042-d0ae5b349dfd}">
           <p14:sldIdLst>
             <p14:sldId id="261"/>
             <p14:sldId id="262"/>
@@ -143,11 +144,12 @@
             <p14:sldId id="266"/>
             <p14:sldId id="267"/>
             <p14:sldId id="268"/>
+            <p14:sldId id="269"/>
           </p14:sldIdLst>
         </p14:section>
-        <p14:section name="Conclusion" id="{4d245877-31b4-8dd1-97e4-bf73335fc3d5}">
+        <p14:section name="Conclusion" id="{08ebfadc-f1b5-3244-c72c-a8e22020aaec}">
           <p14:sldIdLst>
-            <p14:sldId id="269"/>
+            <p14:sldId id="270"/>
           </p14:sldIdLst>
         </p14:section>
       </p14:sectionLst>
@@ -988,7 +990,7 @@
           <a:p>
             <a:r>
               <a:rPr lang="en-US" dirty="0"/>
-              <a:t>ORATEUR : Elios. Tout ce qui est sur cette diapo se démontre en direct : Wireshark, ufw status, connexion SSH par mot de passe refusée.</a:t>
+              <a:t>ORATEUR : Benoit. Suivre le chemin d'une donnée : capteurs et vidéo arrivent sur l'agent IA, passent en TLS 8883 par Mosquitto, l'API les stocke dans Galera via la VIP. Autour : Zabbix supervise tout (port 10050), Ansible déploie tout en SSH. Chaque VLAN n'ouvre que les ports de ces flux.</a:t>
             </a:r>
             <a:endParaRPr lang="en-US" dirty="0"/>
           </a:p>
@@ -1076,7 +1078,7 @@
           <a:p>
             <a:r>
               <a:rPr lang="en-US" dirty="0"/>
-              <a:t>ORATEUR : Benoit. À gauche, l'auto-audit du matin et ses correctifs (détail dans le dossier, section 11). À droite, À COMPLÉTER avec le bilan du pentest de l'après-midi.</a:t>
+              <a:t>ORATEUR : Elios. Le pare-feu et le SSH par clé ont été montrés en démo (ufw status, connexion par mot de passe refusée). Le chiffrement MQTT se prouve sur demande : le firmware vérifie le certificat du broker avec notre CA embarqué.</a:t>
             </a:r>
             <a:endParaRPr lang="en-US" dirty="0"/>
           </a:p>
@@ -1164,7 +1166,7 @@
           <a:p>
             <a:r>
               <a:rPr lang="en-US" dirty="0"/>
-              <a:t>ORATEUR : Martin. Le risque n°1 identifié lundi était l'intégration : on a figé topics MQTT, payloads et routes dès le premier jour. C'est ce qui a permis le bout en bout mercredi.</a:t>
+              <a:t>ORATEUR : Benoit. À gauche, l'auto-audit du matin et ses correctifs (détail dans le dossier, section 11). À droite, À COMPLÉTER avec le bilan du pentest de l'après-midi.</a:t>
             </a:r>
             <a:endParaRPr lang="en-US" dirty="0"/>
           </a:p>
@@ -1252,7 +1254,7 @@
           <a:p>
             <a:r>
               <a:rPr lang="en-US" dirty="0"/>
-              <a:t>ORATEUR : Felis. Conclure en 15 secondes sur les trois points, puis ouvrir les questions. Si on demande la suite : cluster Mosquitto, réentraînement de l'IA sur les données de la salle, sauvegardes automatisées de la base.</a:t>
+              <a:t>ORATEUR : Martin. Le risque n°1 identifié lundi était l'intégration : on a figé topics MQTT, payloads et routes dès le premier jour. C'est ce qui a permis le bout en bout mercredi.</a:t>
             </a:r>
             <a:endParaRPr lang="en-US" dirty="0"/>
           </a:p>
@@ -1276,6 +1278,94 @@
             <a:fld id="{F7021451-1387-4CA6-816F-3879F97B5CBC}" type="slidenum">
               <a:rPr lang="en-US"/>
               <a:t>14</a:t>
+            </a:fld>
+            <a:endParaRPr lang="en-US"/>
+          </a:p>
+        </p:txBody>
+      </p:sp>
+    </p:spTree>
+    <p:extLst>
+      <p:ext uri="{BB962C8B-B14F-4D97-AF65-F5344CB8AC3E}">
+        <p14:creationId xmlns:p14="http://schemas.microsoft.com/office/powerpoint/2010/main" val="1024086991"/>
+      </p:ext>
+    </p:extLst>
+  </p:cSld>
+  <p:clrMapOvr>
+    <a:masterClrMapping/>
+  </p:clrMapOvr>
+</p:notes>
+</file>
+
+<file path=ppt/notesSlides/notesSlide15.xml><?xml version="1.0" encoding="utf-8"?>
+<p:notes xmlns:a="http://schemas.openxmlformats.org/drawingml/2006/main" xmlns:r="http://schemas.openxmlformats.org/officeDocument/2006/relationships" xmlns:p="http://schemas.openxmlformats.org/presentationml/2006/main">
+  <p:cSld>
+    <p:spTree>
+      <p:nvGrpSpPr>
+        <p:cNvPr id="1" name=""/>
+        <p:cNvGrpSpPr/>
+        <p:nvPr/>
+      </p:nvGrpSpPr>
+      <p:grpSpPr>
+        <a:xfrm>
+          <a:off x="0" y="0"/>
+          <a:ext cx="0" cy="0"/>
+          <a:chOff x="0" y="0"/>
+          <a:chExt cx="0" cy="0"/>
+        </a:xfrm>
+      </p:grpSpPr>
+      <p:sp>
+        <p:nvSpPr>
+          <p:cNvPr id="2" name="Slide Image Placeholder 1"/>
+          <p:cNvSpPr>
+            <a:spLocks noGrp="1" noRot="1" noChangeAspect="1"/>
+          </p:cNvSpPr>
+          <p:nvPr>
+            <p:ph type="sldImg"/>
+          </p:nvPr>
+        </p:nvSpPr>
+        <p:spPr/>
+      </p:sp>
+      <p:sp>
+        <p:nvSpPr>
+          <p:cNvPr id="3" name="Notes Placeholder 2"/>
+          <p:cNvSpPr>
+            <a:spLocks noGrp="1"/>
+          </p:cNvSpPr>
+          <p:nvPr>
+            <p:ph type="body" idx="1"/>
+          </p:nvPr>
+        </p:nvSpPr>
+        <p:spPr/>
+        <p:txBody>
+          <a:bodyPr/>
+          <a:lstStyle/>
+          <a:p>
+            <a:r>
+              <a:rPr lang="en-US" dirty="0"/>
+              <a:t>ORATEUR : Felis. Conclure en 15 secondes sur les trois points, puis ouvrir les questions. Si on demande la suite : cluster Mosquitto, réentraînement de l'IA sur les données de la salle, sauvegardes automatisées de la base.</a:t>
+            </a:r>
+            <a:endParaRPr lang="en-US" dirty="0"/>
+          </a:p>
+        </p:txBody>
+      </p:sp>
+      <p:sp>
+        <p:nvSpPr>
+          <p:cNvPr id="4" name="Slide Number Placeholder 3"/>
+          <p:cNvSpPr>
+            <a:spLocks noGrp="1"/>
+          </p:cNvSpPr>
+          <p:nvPr>
+            <p:ph type="sldNum" sz="quarter" idx="10"/>
+          </p:nvPr>
+        </p:nvSpPr>
+        <p:spPr/>
+        <p:txBody>
+          <a:bodyPr/>
+          <a:lstStyle/>
+          <a:p>
+            <a:fld id="{F7021451-1387-4CA6-816F-3879F97B5CBC}" type="slidenum">
+              <a:rPr lang="en-US"/>
+              <a:t>15</a:t>
             </a:fld>
             <a:endParaRPr lang="en-US"/>
           </a:p>
@@ -1604,7 +1694,7 @@
           <a:p>
             <a:r>
               <a:rPr lang="en-US" dirty="0"/>
-              <a:t>ORATEUR : Martin au clavier, Matis raconte, Elios (Wireshark) et Benoit (ufw, SSH). 2:00 – 5:00 · Démo live, dans cet ordre. Préparer avant : anomaly_service lancé depuis plus de 60 s, boîtier chauffé depuis 60 s, Wireshark ouvert sur le port 8883, terminal SSH prêt. Plan B si le boîtier tombe : simulate.py --scenario demo --publish --speed 5.</a:t>
+              <a:t>ORATEUR : Martin au clavier, Matis raconte, Benoit (ufw, SSH). 2:00 – 5:00 · Démo live, dans cet ordre. Préparer avant : anomaly_service lancé depuis plus de 60 s, boîtier chauffé depuis 60 s, terminal SSH prêt. Plan B si le boîtier tombe : simulate.py --scenario demo --publish --speed 5.</a:t>
             </a:r>
             <a:endParaRPr lang="en-US" dirty="0"/>
           </a:p>
@@ -2939,7 +3029,7 @@
       </p:sp>
       <p:pic>
         <p:nvPicPr>
-          <p:cNvPr id="5" name="logo-bouclier" descr="/Users/felis/Documents/Workspace/Ecole/Master/Workshop-2026/Sentinel-X-Yanshee-defender-3000/livrables/sources/pptx/shield.png">    </p:cNvPr>
+          <p:cNvPr id="5" name="logo-bouclier" descr="/Users/felis/Documents/Workspace/Ecole/Master/Workshop-2026/Interne-G7/sources/pptx/shield.png">    </p:cNvPr>
           <p:cNvPicPr>
             <a:picLocks noChangeAspect="1"/>
           </p:cNvPicPr>
@@ -3827,6 +3917,438 @@
                   <a:schemeClr val="tx1"/>
                 </a:solidFill>
               </a:rPr>
+              <a:t>Schéma réseau : 4 VLAN et leurs flux</a:t>
+            </a:r>
+            <a:endParaRPr lang="en-US" sz="3200" dirty="0"/>
+          </a:p>
+        </p:txBody>
+      </p:sp>
+      <p:pic>
+        <p:nvPicPr>
+          <p:cNvPr id="3" name="schema-reseau" descr="/Users/felis/Documents/Workspace/Ecole/Master/Workshop-2026/Interne-G7/sources/pptx/schema_reseau.png">    </p:cNvPr>
+          <p:cNvPicPr>
+            <a:picLocks noChangeAspect="1"/>
+          </p:cNvPicPr>
+          <p:nvPr/>
+        </p:nvPicPr>
+        <p:blipFill>
+          <a:blip r:embed="rId1"/>
+          <a:stretch>
+            <a:fillRect/>
+          </a:stretch>
+        </p:blipFill>
+        <p:spPr>
+          <a:xfrm>
+            <a:off x="548640" y="1188720"/>
+            <a:ext cx="5413248" cy="5120640"/>
+          </a:xfrm>
+          <a:prstGeom prst="rect">
+            <a:avLst/>
+          </a:prstGeom>
+        </p:spPr>
+      </p:pic>
+      <p:sp>
+        <p:nvSpPr>
+          <p:cNvPr id="4" name="flux-1-barre"/>
+          <p:cNvSpPr/>
+          <p:nvPr/>
+        </p:nvSpPr>
+        <p:spPr>
+          <a:xfrm>
+            <a:off x="6492240" y="1463040"/>
+            <a:ext cx="73152" cy="914400"/>
+          </a:xfrm>
+          <a:prstGeom prst="rect">
+            <a:avLst/>
+          </a:prstGeom>
+          <a:solidFill>
+            <a:srgbClr val="C8372B"/>
+          </a:solidFill>
+          <a:ln w="12700">
+            <a:solidFill>
+              <a:srgbClr val="C8372B"/>
+            </a:solidFill>
+            <a:prstDash val="solid"/>
+          </a:ln>
+        </p:spPr>
+      </p:sp>
+      <p:sp>
+        <p:nvSpPr>
+          <p:cNvPr id="5" name="flux-1"/>
+          <p:cNvSpPr txBox="1"/>
+          <p:nvPr/>
+        </p:nvSpPr>
+        <p:spPr>
+          <a:xfrm>
+            <a:off x="6766560" y="1463040"/>
+            <a:ext cx="4846320" cy="914400"/>
+          </a:xfrm>
+          <a:prstGeom prst="rect">
+            <a:avLst/>
+          </a:prstGeom>
+          <a:noFill/>
+          <a:ln/>
+        </p:spPr>
+        <p:txBody>
+          <a:bodyPr wrap="square" lIns="0" tIns="0" rIns="0" bIns="0" rtlCol="0" anchor="t"/>
+          <a:lstStyle/>
+          <a:p>
+            <a:pPr indent="0" marL="0">
+              <a:buNone/>
+            </a:pPr>
+            <a:r>
+              <a:rPr lang="en-US" sz="2000" b="1" dirty="0">
+                <a:solidFill>
+                  <a:schemeClr val="tx1"/>
+                </a:solidFill>
+              </a:rPr>
+              <a:t>TLS 8883</a:t>
+            </a:r>
+            <a:endParaRPr lang="en-US" sz="2000" dirty="0"/>
+          </a:p>
+          <a:p>
+            <a:pPr indent="0" marL="0">
+              <a:buNone/>
+            </a:pPr>
+            <a:r>
+              <a:rPr lang="en-US" sz="1400" dirty="0">
+                <a:solidFill>
+                  <a:schemeClr val="tx2"/>
+                </a:solidFill>
+              </a:rPr>
+              <a:t>Agent IA → Mosquitto → API Web, tout le MQTT est chiffré</a:t>
+            </a:r>
+            <a:endParaRPr lang="en-US" sz="2000" dirty="0"/>
+          </a:p>
+        </p:txBody>
+      </p:sp>
+      <p:sp>
+        <p:nvSpPr>
+          <p:cNvPr id="6" name="flux-2-barre"/>
+          <p:cNvSpPr/>
+          <p:nvPr/>
+        </p:nvSpPr>
+        <p:spPr>
+          <a:xfrm>
+            <a:off x="6492240" y="2606040"/>
+            <a:ext cx="73152" cy="914400"/>
+          </a:xfrm>
+          <a:prstGeom prst="rect">
+            <a:avLst/>
+          </a:prstGeom>
+          <a:solidFill>
+            <a:srgbClr val="14181F"/>
+          </a:solidFill>
+          <a:ln w="12700">
+            <a:solidFill>
+              <a:srgbClr val="14181F"/>
+            </a:solidFill>
+            <a:prstDash val="solid"/>
+          </a:ln>
+        </p:spPr>
+      </p:sp>
+      <p:sp>
+        <p:nvSpPr>
+          <p:cNvPr id="7" name="flux-2"/>
+          <p:cNvSpPr txBox="1"/>
+          <p:nvPr/>
+        </p:nvSpPr>
+        <p:spPr>
+          <a:xfrm>
+            <a:off x="6766560" y="2606040"/>
+            <a:ext cx="4846320" cy="914400"/>
+          </a:xfrm>
+          <a:prstGeom prst="rect">
+            <a:avLst/>
+          </a:prstGeom>
+          <a:noFill/>
+          <a:ln/>
+        </p:spPr>
+        <p:txBody>
+          <a:bodyPr wrap="square" lIns="0" tIns="0" rIns="0" bIns="0" rtlCol="0" anchor="t"/>
+          <a:lstStyle/>
+          <a:p>
+            <a:pPr indent="0" marL="0">
+              <a:buNone/>
+            </a:pPr>
+            <a:r>
+              <a:rPr lang="en-US" sz="2000" b="1" dirty="0">
+                <a:solidFill>
+                  <a:schemeClr val="tx1"/>
+                </a:solidFill>
+              </a:rPr>
+              <a:t>Stockage</a:t>
+            </a:r>
+            <a:endParaRPr lang="en-US" sz="2000" dirty="0"/>
+          </a:p>
+          <a:p>
+            <a:pPr indent="0" marL="0">
+              <a:buNone/>
+            </a:pPr>
+            <a:r>
+              <a:rPr lang="en-US" sz="1400" dirty="0">
+                <a:solidFill>
+                  <a:schemeClr val="tx2"/>
+                </a:solidFill>
+              </a:rPr>
+              <a:t>l'API écrit dans Galera via la VIP HAProxy, jamais sur un nœud isolé</a:t>
+            </a:r>
+            <a:endParaRPr lang="en-US" sz="2000" dirty="0"/>
+          </a:p>
+        </p:txBody>
+      </p:sp>
+      <p:sp>
+        <p:nvSpPr>
+          <p:cNvPr id="8" name="flux-3-barre"/>
+          <p:cNvSpPr/>
+          <p:nvPr/>
+        </p:nvSpPr>
+        <p:spPr>
+          <a:xfrm>
+            <a:off x="6492240" y="3749040"/>
+            <a:ext cx="73152" cy="914400"/>
+          </a:xfrm>
+          <a:prstGeom prst="rect">
+            <a:avLst/>
+          </a:prstGeom>
+          <a:solidFill>
+            <a:srgbClr val="C8372B"/>
+          </a:solidFill>
+          <a:ln w="12700">
+            <a:solidFill>
+              <a:srgbClr val="C8372B"/>
+            </a:solidFill>
+            <a:prstDash val="solid"/>
+          </a:ln>
+        </p:spPr>
+      </p:sp>
+      <p:sp>
+        <p:nvSpPr>
+          <p:cNvPr id="9" name="flux-3"/>
+          <p:cNvSpPr txBox="1"/>
+          <p:nvPr/>
+        </p:nvSpPr>
+        <p:spPr>
+          <a:xfrm>
+            <a:off x="6766560" y="3749040"/>
+            <a:ext cx="4846320" cy="914400"/>
+          </a:xfrm>
+          <a:prstGeom prst="rect">
+            <a:avLst/>
+          </a:prstGeom>
+          <a:noFill/>
+          <a:ln/>
+        </p:spPr>
+        <p:txBody>
+          <a:bodyPr wrap="square" lIns="0" tIns="0" rIns="0" bIns="0" rtlCol="0" anchor="t"/>
+          <a:lstStyle/>
+          <a:p>
+            <a:pPr indent="0" marL="0">
+              <a:buNone/>
+            </a:pPr>
+            <a:r>
+              <a:rPr lang="en-US" sz="2000" b="1" dirty="0">
+                <a:solidFill>
+                  <a:schemeClr val="tx1"/>
+                </a:solidFill>
+              </a:rPr>
+              <a:t>Port 10050</a:t>
+            </a:r>
+            <a:endParaRPr lang="en-US" sz="2000" dirty="0"/>
+          </a:p>
+          <a:p>
+            <a:pPr indent="0" marL="0">
+              <a:buNone/>
+            </a:pPr>
+            <a:r>
+              <a:rPr lang="en-US" sz="1400" dirty="0">
+                <a:solidFill>
+                  <a:schemeClr val="tx2"/>
+                </a:solidFill>
+              </a:rPr>
+              <a:t>Zabbix interroge l'agent de chaque machine des 4 VLAN</a:t>
+            </a:r>
+            <a:endParaRPr lang="en-US" sz="2000" dirty="0"/>
+          </a:p>
+        </p:txBody>
+      </p:sp>
+      <p:sp>
+        <p:nvSpPr>
+          <p:cNvPr id="10" name="flux-4-barre"/>
+          <p:cNvSpPr/>
+          <p:nvPr/>
+        </p:nvSpPr>
+        <p:spPr>
+          <a:xfrm>
+            <a:off x="6492240" y="4892040"/>
+            <a:ext cx="73152" cy="914400"/>
+          </a:xfrm>
+          <a:prstGeom prst="rect">
+            <a:avLst/>
+          </a:prstGeom>
+          <a:solidFill>
+            <a:srgbClr val="14181F"/>
+          </a:solidFill>
+          <a:ln w="12700">
+            <a:solidFill>
+              <a:srgbClr val="14181F"/>
+            </a:solidFill>
+            <a:prstDash val="solid"/>
+          </a:ln>
+        </p:spPr>
+      </p:sp>
+      <p:sp>
+        <p:nvSpPr>
+          <p:cNvPr id="11" name="flux-4"/>
+          <p:cNvSpPr txBox="1"/>
+          <p:nvPr/>
+        </p:nvSpPr>
+        <p:spPr>
+          <a:xfrm>
+            <a:off x="6766560" y="4892040"/>
+            <a:ext cx="4846320" cy="914400"/>
+          </a:xfrm>
+          <a:prstGeom prst="rect">
+            <a:avLst/>
+          </a:prstGeom>
+          <a:noFill/>
+          <a:ln/>
+        </p:spPr>
+        <p:txBody>
+          <a:bodyPr wrap="square" lIns="0" tIns="0" rIns="0" bIns="0" rtlCol="0" anchor="t"/>
+          <a:lstStyle/>
+          <a:p>
+            <a:pPr indent="0" marL="0">
+              <a:buNone/>
+            </a:pPr>
+            <a:r>
+              <a:rPr lang="en-US" sz="2000" b="1" dirty="0">
+                <a:solidFill>
+                  <a:schemeClr val="tx1"/>
+                </a:solidFill>
+              </a:rPr>
+              <a:t>SSH 22</a:t>
+            </a:r>
+            <a:endParaRPr lang="en-US" sz="2000" dirty="0"/>
+          </a:p>
+          <a:p>
+            <a:pPr indent="0" marL="0">
+              <a:buNone/>
+            </a:pPr>
+            <a:r>
+              <a:rPr lang="en-US" sz="1400" dirty="0">
+                <a:solidFill>
+                  <a:schemeClr val="tx2"/>
+                </a:solidFill>
+              </a:rPr>
+              <a:t>Ansible déploie Galera, Zabbix et les agents depuis le VLAN 40</a:t>
+            </a:r>
+            <a:endParaRPr lang="en-US" sz="2000" dirty="0"/>
+          </a:p>
+        </p:txBody>
+      </p:sp>
+      <p:sp>
+        <p:nvSpPr>
+          <p:cNvPr id="25" name="Slide Number Placeholder 0"/>
+          <p:cNvSpPr>
+            <a:spLocks noGrp="1"/>
+          </p:cNvSpPr>
+          <p:nvPr>
+            <p:ph type="sldNum" sz="quarter" idx="4294967295"/>
+          </p:nvPr>
+        </p:nvSpPr>
+        <p:spPr>
+          <a:xfrm>
+            <a:off x="11247120" y="6400800"/>
+            <a:ext cx="457200" cy="274320"/>
+          </a:xfrm>
+          <a:prstGeom prst="rect">
+            <a:avLst/>
+          </a:prstGeom>
+          <a:extLst>
+            <a:ext uri="{C572A759-6A51-4108-AA02-DFA0A04FC94B}">
+              <ma14:wrappingTextBoxFlag xmlns:ma14="http://schemas.microsoft.com/office/mac/drawingml/2011/main" val="0"/>
+            </a:ext>
+          </a:extLst>
+        </p:spPr>
+        <p:txBody>
+          <a:bodyPr/>
+          <a:lstStyle>
+            <a:lvl1pPr>
+              <a:defRPr sz="1000">
+                <a:solidFill>
+                  <a:srgbClr val="6B7886"/>
+                </a:solidFill>
+              </a:defRPr>
+            </a:lvl1pPr>
+          </a:lstStyle>
+          <a:p>
+            <a:pPr algn="r"/>
+            <a:fld id="{F7021451-1387-4CA6-816F-3879F97B5CBC}" type="slidenum">
+              <a:rPr b="0" lang="en-US"/>
+              <a:t>11</a:t>
+            </a:fld>
+            <a:endParaRPr lang="en-US"/>
+          </a:p>
+        </p:txBody>
+      </p:sp>
+    </p:spTree>
+  </p:cSld>
+  <p:clrMapOvr>
+    <a:masterClrMapping/>
+  </p:clrMapOvr>
+</p:sld>
+</file>
+
+<file path=ppt/slides/slide12.xml><?xml version="1.0" encoding="utf-8"?>
+<p:sld xmlns:a="http://schemas.openxmlformats.org/drawingml/2006/main" xmlns:r="http://schemas.openxmlformats.org/officeDocument/2006/relationships" xmlns:p="http://schemas.openxmlformats.org/presentationml/2006/main">
+  <p:cSld name="Slide 12">
+    <p:spTree>
+      <p:nvGrpSpPr>
+        <p:cNvPr id="1" name=""/>
+        <p:cNvGrpSpPr/>
+        <p:nvPr/>
+      </p:nvGrpSpPr>
+      <p:grpSpPr>
+        <a:xfrm>
+          <a:off x="0" y="0"/>
+          <a:ext cx="0" cy="0"/>
+          <a:chOff x="0" y="0"/>
+          <a:chExt cx="0" cy="0"/>
+        </a:xfrm>
+      </p:grpSpPr>
+      <p:sp>
+        <p:nvSpPr>
+          <p:cNvPr id="2" name="Text 0"/>
+          <p:cNvSpPr/>
+          <p:nvPr>
+            <p:ph idx="100" type="title" hasCustomPrompt="1"/>
+          </p:nvPr>
+        </p:nvSpPr>
+        <p:spPr>
+          <a:xfrm>
+            <a:off x="548640" y="320040"/>
+            <a:ext cx="11064240" cy="777240"/>
+          </a:xfrm>
+          <a:prstGeom prst="rect">
+            <a:avLst/>
+          </a:prstGeom>
+          <a:noFill/>
+          <a:ln/>
+        </p:spPr>
+        <p:txBody>
+          <a:bodyPr wrap="square" lIns="0" tIns="0" rIns="0" bIns="0" rtlCol="0" anchor="ctr"/>
+          <a:lstStyle/>
+          <a:p>
+            <a:pPr algn="l" indent="0" marL="0">
+              <a:buNone/>
+            </a:pPr>
+            <a:r>
+              <a:rPr lang="en-US" sz="3200" b="1" dirty="0">
+                <a:solidFill>
+                  <a:schemeClr val="tx1"/>
+                </a:solidFill>
+              </a:rPr>
               <a:t>Sécurité : ce que nous prouvons</a:t>
             </a:r>
             <a:endParaRPr lang="en-US" sz="3200" dirty="0"/>
@@ -3835,7 +4357,7 @@
       </p:sp>
       <p:graphicFrame>
         <p:nvGraphicFramePr>
-          <p:cNvPr id="12" name="matrice-securite"/>
+          <p:cNvPr id="13" name="matrice-securite"/>
           <p:cNvGraphicFramePr>
             <a:graphicFrameLocks noGrp="1"/>
           </p:cNvGraphicFramePr>
@@ -5153,619 +5675,6 @@
             <a:pPr algn="r"/>
             <a:fld id="{F7021451-1387-4CA6-816F-3879F97B5CBC}" type="slidenum">
               <a:rPr b="0" lang="en-US"/>
-              <a:t>11</a:t>
-            </a:fld>
-            <a:endParaRPr lang="en-US"/>
-          </a:p>
-        </p:txBody>
-      </p:sp>
-    </p:spTree>
-  </p:cSld>
-  <p:clrMapOvr>
-    <a:masterClrMapping/>
-  </p:clrMapOvr>
-</p:sld>
-</file>
-
-<file path=ppt/slides/slide12.xml><?xml version="1.0" encoding="utf-8"?>
-<p:sld xmlns:a="http://schemas.openxmlformats.org/drawingml/2006/main" xmlns:r="http://schemas.openxmlformats.org/officeDocument/2006/relationships" xmlns:p="http://schemas.openxmlformats.org/presentationml/2006/main">
-  <p:cSld name="Slide 12">
-    <p:spTree>
-      <p:nvGrpSpPr>
-        <p:cNvPr id="1" name=""/>
-        <p:cNvGrpSpPr/>
-        <p:nvPr/>
-      </p:nvGrpSpPr>
-      <p:grpSpPr>
-        <a:xfrm>
-          <a:off x="0" y="0"/>
-          <a:ext cx="0" cy="0"/>
-          <a:chOff x="0" y="0"/>
-          <a:chExt cx="0" cy="0"/>
-        </a:xfrm>
-      </p:grpSpPr>
-      <p:sp>
-        <p:nvSpPr>
-          <p:cNvPr id="2" name="Text 0"/>
-          <p:cNvSpPr/>
-          <p:nvPr>
-            <p:ph idx="100" type="title" hasCustomPrompt="1"/>
-          </p:nvPr>
-        </p:nvSpPr>
-        <p:spPr>
-          <a:xfrm>
-            <a:off x="548640" y="320040"/>
-            <a:ext cx="11064240" cy="777240"/>
-          </a:xfrm>
-          <a:prstGeom prst="rect">
-            <a:avLst/>
-          </a:prstGeom>
-          <a:noFill/>
-          <a:ln/>
-        </p:spPr>
-        <p:txBody>
-          <a:bodyPr wrap="square" lIns="0" tIns="0" rIns="0" bIns="0" rtlCol="0" anchor="ctr"/>
-          <a:lstStyle/>
-          <a:p>
-            <a:pPr algn="l" indent="0" marL="0">
-              <a:buNone/>
-            </a:pPr>
-            <a:r>
-              <a:rPr lang="en-US" sz="3200" b="1" dirty="0">
-                <a:solidFill>
-                  <a:schemeClr val="tx1"/>
-                </a:solidFill>
-              </a:rPr>
-              <a:t>Auto-audit et pentest croisé</a:t>
-            </a:r>
-            <a:endParaRPr lang="en-US" sz="3200" dirty="0"/>
-          </a:p>
-        </p:txBody>
-      </p:sp>
-      <p:sp>
-        <p:nvSpPr>
-          <p:cNvPr id="3" name="stat-correctifs-fond"/>
-          <p:cNvSpPr/>
-          <p:nvPr/>
-        </p:nvSpPr>
-        <p:spPr>
-          <a:xfrm>
-            <a:off x="548640" y="1463040"/>
-            <a:ext cx="5577840" cy="1234440"/>
-          </a:xfrm>
-          <a:prstGeom prst="roundRect">
-            <a:avLst>
-              <a:gd name="adj" fmla="val 4444"/>
-            </a:avLst>
-          </a:prstGeom>
-          <a:solidFill>
-            <a:schemeClr val="tx1"/>
-          </a:solidFill>
-          <a:ln w="12700">
-            <a:solidFill>
-              <a:schemeClr val="tx1"/>
-            </a:solidFill>
-            <a:prstDash val="solid"/>
-          </a:ln>
-        </p:spPr>
-      </p:sp>
-      <p:sp>
-        <p:nvSpPr>
-          <p:cNvPr id="4" name="stat-correctifs-texte"/>
-          <p:cNvSpPr txBox="1"/>
-          <p:nvPr/>
-        </p:nvSpPr>
-        <p:spPr>
-          <a:xfrm>
-            <a:off x="731520" y="1572768"/>
-            <a:ext cx="5212080" cy="1014984"/>
-          </a:xfrm>
-          <a:prstGeom prst="rect">
-            <a:avLst/>
-          </a:prstGeom>
-          <a:noFill/>
-          <a:ln/>
-        </p:spPr>
-        <p:txBody>
-          <a:bodyPr wrap="square" lIns="0" tIns="0" rIns="0" bIns="0" rtlCol="0" anchor="t"/>
-          <a:lstStyle/>
-          <a:p>
-            <a:pPr indent="0" marL="0">
-              <a:spcAft>
-                <a:spcPts val="400"/>
-              </a:spcAft>
-              <a:buNone/>
-            </a:pPr>
-            <a:r>
-              <a:rPr lang="en-US" sz="3600" b="1" dirty="0">
-                <a:solidFill>
-                  <a:schemeClr val="accent1"/>
-                </a:solidFill>
-              </a:rPr>
-              <a:t>5 correctifs</a:t>
-            </a:r>
-            <a:endParaRPr lang="en-US" sz="3600" dirty="0"/>
-          </a:p>
-          <a:p>
-            <a:pPr indent="0" marL="0">
-              <a:spcAft>
-                <a:spcPts val="400"/>
-              </a:spcAft>
-              <a:buNone/>
-            </a:pPr>
-            <a:r>
-              <a:rPr lang="en-US" sz="1300" dirty="0">
-                <a:solidFill>
-                  <a:schemeClr val="bg2"/>
-                </a:solidFill>
-              </a:rPr>
-              <a:t>appliqués avant le pentest, après revue de toutes les briques</a:t>
-            </a:r>
-            <a:endParaRPr lang="en-US" sz="3600" dirty="0"/>
-          </a:p>
-        </p:txBody>
-      </p:sp>
-      <p:sp>
-        <p:nvSpPr>
-          <p:cNvPr id="5" name="correctif-1-puce"/>
-          <p:cNvSpPr/>
-          <p:nvPr/>
-        </p:nvSpPr>
-        <p:spPr>
-          <a:xfrm>
-            <a:off x="548640" y="2999232"/>
-            <a:ext cx="274320" cy="274320"/>
-          </a:xfrm>
-          <a:prstGeom prst="ellipse">
-            <a:avLst/>
-          </a:prstGeom>
-          <a:solidFill>
-            <a:schemeClr val="accent3"/>
-          </a:solidFill>
-          <a:ln w="12700">
-            <a:solidFill>
-              <a:schemeClr val="accent3"/>
-            </a:solidFill>
-            <a:prstDash val="solid"/>
-          </a:ln>
-        </p:spPr>
-      </p:sp>
-      <p:sp>
-        <p:nvSpPr>
-          <p:cNvPr id="6" name="correctif-1"/>
-          <p:cNvSpPr txBox="1"/>
-          <p:nvPr/>
-        </p:nvSpPr>
-        <p:spPr>
-          <a:xfrm>
-            <a:off x="1005840" y="2926080"/>
-            <a:ext cx="5120640" cy="457200"/>
-          </a:xfrm>
-          <a:prstGeom prst="rect">
-            <a:avLst/>
-          </a:prstGeom>
-          <a:noFill/>
-          <a:ln/>
-        </p:spPr>
-        <p:txBody>
-          <a:bodyPr wrap="square" lIns="0" tIns="0" rIns="0" bIns="0" rtlCol="0" anchor="ctr"/>
-          <a:lstStyle/>
-          <a:p>
-            <a:pPr indent="0" marL="0">
-              <a:buNone/>
-            </a:pPr>
-            <a:r>
-              <a:rPr lang="en-US" sz="1400" b="1" dirty="0">
-                <a:solidFill>
-                  <a:schemeClr val="tx1"/>
-                </a:solidFill>
-              </a:rPr>
-              <a:t>MQTT exclusivement sur TLS : </a:t>
-            </a:r>
-            <a:pPr indent="0" marL="0">
-              <a:buNone/>
-            </a:pPr>
-            <a:r>
-              <a:rPr lang="en-US" sz="1400" dirty="0">
-                <a:solidFill>
-                  <a:schemeClr val="tx2"/>
-                </a:solidFill>
-              </a:rPr>
-              <a:t>le boîtier ne parle plus jamais en clair</a:t>
-            </a:r>
-            <a:endParaRPr lang="en-US" sz="1400" dirty="0"/>
-          </a:p>
-        </p:txBody>
-      </p:sp>
-      <p:sp>
-        <p:nvSpPr>
-          <p:cNvPr id="7" name="correctif-2-puce"/>
-          <p:cNvSpPr/>
-          <p:nvPr/>
-        </p:nvSpPr>
-        <p:spPr>
-          <a:xfrm>
-            <a:off x="548640" y="3685032"/>
-            <a:ext cx="274320" cy="274320"/>
-          </a:xfrm>
-          <a:prstGeom prst="ellipse">
-            <a:avLst/>
-          </a:prstGeom>
-          <a:solidFill>
-            <a:schemeClr val="accent3"/>
-          </a:solidFill>
-          <a:ln w="12700">
-            <a:solidFill>
-              <a:schemeClr val="accent3"/>
-            </a:solidFill>
-            <a:prstDash val="solid"/>
-          </a:ln>
-        </p:spPr>
-      </p:sp>
-      <p:sp>
-        <p:nvSpPr>
-          <p:cNvPr id="8" name="correctif-2"/>
-          <p:cNvSpPr txBox="1"/>
-          <p:nvPr/>
-        </p:nvSpPr>
-        <p:spPr>
-          <a:xfrm>
-            <a:off x="1005840" y="3611880"/>
-            <a:ext cx="5120640" cy="457200"/>
-          </a:xfrm>
-          <a:prstGeom prst="rect">
-            <a:avLst/>
-          </a:prstGeom>
-          <a:noFill/>
-          <a:ln/>
-        </p:spPr>
-        <p:txBody>
-          <a:bodyPr wrap="square" lIns="0" tIns="0" rIns="0" bIns="0" rtlCol="0" anchor="ctr"/>
-          <a:lstStyle/>
-          <a:p>
-            <a:pPr indent="0" marL="0">
-              <a:buNone/>
-            </a:pPr>
-            <a:r>
-              <a:rPr lang="en-US" sz="1400" b="1" dirty="0">
-                <a:solidFill>
-                  <a:schemeClr val="tx1"/>
-                </a:solidFill>
-              </a:rPr>
-              <a:t>Secrets hors du dépôt : </a:t>
-            </a:r>
-            <a:pPr indent="0" marL="0">
-              <a:buNone/>
-            </a:pPr>
-            <a:r>
-              <a:rPr lang="en-US" sz="1400" dirty="0">
-                <a:solidFill>
-                  <a:schemeClr val="tx2"/>
-                </a:solidFill>
-              </a:rPr>
-              <a:t>.env, secrets.h, vault.yml exclus, modèles fournis</a:t>
-            </a:r>
-            <a:endParaRPr lang="en-US" sz="1400" dirty="0"/>
-          </a:p>
-        </p:txBody>
-      </p:sp>
-      <p:sp>
-        <p:nvSpPr>
-          <p:cNvPr id="9" name="correctif-3-puce"/>
-          <p:cNvSpPr/>
-          <p:nvPr/>
-        </p:nvSpPr>
-        <p:spPr>
-          <a:xfrm>
-            <a:off x="548640" y="4370832"/>
-            <a:ext cx="274320" cy="274320"/>
-          </a:xfrm>
-          <a:prstGeom prst="ellipse">
-            <a:avLst/>
-          </a:prstGeom>
-          <a:solidFill>
-            <a:schemeClr val="accent3"/>
-          </a:solidFill>
-          <a:ln w="12700">
-            <a:solidFill>
-              <a:schemeClr val="accent3"/>
-            </a:solidFill>
-            <a:prstDash val="solid"/>
-          </a:ln>
-        </p:spPr>
-      </p:sp>
-      <p:sp>
-        <p:nvSpPr>
-          <p:cNvPr id="10" name="correctif-3"/>
-          <p:cNvSpPr txBox="1"/>
-          <p:nvPr/>
-        </p:nvSpPr>
-        <p:spPr>
-          <a:xfrm>
-            <a:off x="1005840" y="4297680"/>
-            <a:ext cx="5120640" cy="457200"/>
-          </a:xfrm>
-          <a:prstGeom prst="rect">
-            <a:avLst/>
-          </a:prstGeom>
-          <a:noFill/>
-          <a:ln/>
-        </p:spPr>
-        <p:txBody>
-          <a:bodyPr wrap="square" lIns="0" tIns="0" rIns="0" bIns="0" rtlCol="0" anchor="ctr"/>
-          <a:lstStyle/>
-          <a:p>
-            <a:pPr indent="0" marL="0">
-              <a:buNone/>
-            </a:pPr>
-            <a:r>
-              <a:rPr lang="en-US" sz="1400" b="1" dirty="0">
-                <a:solidFill>
-                  <a:schemeClr val="tx1"/>
-                </a:solidFill>
-              </a:rPr>
-              <a:t>Clés obligatoires : </a:t>
-            </a:r>
-            <a:pPr indent="0" marL="0">
-              <a:buNone/>
-            </a:pPr>
-            <a:r>
-              <a:rPr lang="en-US" sz="1400" dirty="0">
-                <a:solidFill>
-                  <a:schemeClr val="tx2"/>
-                </a:solidFill>
-              </a:rPr>
-              <a:t>robot et API refusent de démarrer sans secret</a:t>
-            </a:r>
-            <a:endParaRPr lang="en-US" sz="1400" dirty="0"/>
-          </a:p>
-        </p:txBody>
-      </p:sp>
-      <p:sp>
-        <p:nvSpPr>
-          <p:cNvPr id="11" name="correctif-4-puce"/>
-          <p:cNvSpPr/>
-          <p:nvPr/>
-        </p:nvSpPr>
-        <p:spPr>
-          <a:xfrm>
-            <a:off x="548640" y="5056632"/>
-            <a:ext cx="274320" cy="274320"/>
-          </a:xfrm>
-          <a:prstGeom prst="ellipse">
-            <a:avLst/>
-          </a:prstGeom>
-          <a:solidFill>
-            <a:schemeClr val="accent3"/>
-          </a:solidFill>
-          <a:ln w="12700">
-            <a:solidFill>
-              <a:schemeClr val="accent3"/>
-            </a:solidFill>
-            <a:prstDash val="solid"/>
-          </a:ln>
-        </p:spPr>
-      </p:sp>
-      <p:sp>
-        <p:nvSpPr>
-          <p:cNvPr id="12" name="correctif-4"/>
-          <p:cNvSpPr txBox="1"/>
-          <p:nvPr/>
-        </p:nvSpPr>
-        <p:spPr>
-          <a:xfrm>
-            <a:off x="1005840" y="4983480"/>
-            <a:ext cx="5120640" cy="457200"/>
-          </a:xfrm>
-          <a:prstGeom prst="rect">
-            <a:avLst/>
-          </a:prstGeom>
-          <a:noFill/>
-          <a:ln/>
-        </p:spPr>
-        <p:txBody>
-          <a:bodyPr wrap="square" lIns="0" tIns="0" rIns="0" bIns="0" rtlCol="0" anchor="ctr"/>
-          <a:lstStyle/>
-          <a:p>
-            <a:pPr indent="0" marL="0">
-              <a:buNone/>
-            </a:pPr>
-            <a:r>
-              <a:rPr lang="en-US" sz="1400" b="1" dirty="0">
-                <a:solidFill>
-                  <a:schemeClr val="tx1"/>
-                </a:solidFill>
-              </a:rPr>
-              <a:t>Flux annoté au dashboard : </a:t>
-            </a:r>
-            <a:pPr indent="0" marL="0">
-              <a:buNone/>
-            </a:pPr>
-            <a:r>
-              <a:rPr lang="en-US" sz="1400" dirty="0">
-                <a:solidFill>
-                  <a:schemeClr val="tx2"/>
-                </a:solidFill>
-              </a:rPr>
-              <a:t>l'API relaie le flux YOLO, robot en repli</a:t>
-            </a:r>
-            <a:endParaRPr lang="en-US" sz="1400" dirty="0"/>
-          </a:p>
-        </p:txBody>
-      </p:sp>
-      <p:sp>
-        <p:nvSpPr>
-          <p:cNvPr id="13" name="pentest-fond"/>
-          <p:cNvSpPr/>
-          <p:nvPr/>
-        </p:nvSpPr>
-        <p:spPr>
-          <a:xfrm>
-            <a:off x="6492240" y="1463040"/>
-            <a:ext cx="5120640" cy="4160520"/>
-          </a:xfrm>
-          <a:prstGeom prst="roundRect">
-            <a:avLst>
-              <a:gd name="adj" fmla="val 1319"/>
-            </a:avLst>
-          </a:prstGeom>
-          <a:solidFill>
-            <a:schemeClr val="tx1"/>
-          </a:solidFill>
-          <a:ln w="12700">
-            <a:solidFill>
-              <a:schemeClr val="tx1"/>
-            </a:solidFill>
-            <a:prstDash val="solid"/>
-          </a:ln>
-        </p:spPr>
-      </p:sp>
-      <p:sp>
-        <p:nvSpPr>
-          <p:cNvPr id="14" name="pentest-resultats"/>
-          <p:cNvSpPr txBox="1"/>
-          <p:nvPr/>
-        </p:nvSpPr>
-        <p:spPr>
-          <a:xfrm>
-            <a:off x="6720840" y="1645920"/>
-            <a:ext cx="4663440" cy="3794760"/>
-          </a:xfrm>
-          <a:prstGeom prst="rect">
-            <a:avLst/>
-          </a:prstGeom>
-          <a:noFill/>
-          <a:ln/>
-        </p:spPr>
-        <p:txBody>
-          <a:bodyPr wrap="square" lIns="0" tIns="0" rIns="0" bIns="0" rtlCol="0" anchor="t"/>
-          <a:lstStyle/>
-          <a:p>
-            <a:pPr indent="0" marL="0">
-              <a:spcAft>
-                <a:spcPts val="1400"/>
-              </a:spcAft>
-              <a:buNone/>
-            </a:pPr>
-            <a:r>
-              <a:rPr lang="en-US" sz="1200" b="1" spc="200" kern="0" dirty="0">
-                <a:solidFill>
-                  <a:schemeClr val="accent1"/>
-                </a:solidFill>
-              </a:rPr>
-              <a:t>PENTEST CROISÉ · 8 OCTOBRE</a:t>
-            </a:r>
-            <a:endParaRPr lang="en-US" sz="1200" dirty="0"/>
-          </a:p>
-          <a:p>
-            <a:pPr indent="0" marL="0">
-              <a:spcAft>
-                <a:spcPts val="1400"/>
-              </a:spcAft>
-              <a:buNone/>
-            </a:pPr>
-            <a:r>
-              <a:rPr lang="en-US" sz="1600" dirty="0">
-                <a:solidFill>
-                  <a:schemeClr val="bg1"/>
-                </a:solidFill>
-              </a:rPr>
-              <a:t>Attaques subies : …</a:t>
-            </a:r>
-            <a:endParaRPr lang="en-US" sz="1200" dirty="0"/>
-          </a:p>
-          <a:p>
-            <a:pPr indent="0" marL="0">
-              <a:spcAft>
-                <a:spcPts val="1400"/>
-              </a:spcAft>
-              <a:buNone/>
-            </a:pPr>
-            <a:r>
-              <a:rPr lang="en-US" sz="1600" dirty="0">
-                <a:solidFill>
-                  <a:schemeClr val="bg1"/>
-                </a:solidFill>
-              </a:rPr>
-              <a:t>Attaques bloquées : …</a:t>
-            </a:r>
-            <a:endParaRPr lang="en-US" sz="1200" dirty="0"/>
-          </a:p>
-          <a:p>
-            <a:pPr indent="0" marL="0">
-              <a:spcAft>
-                <a:spcPts val="1400"/>
-              </a:spcAft>
-              <a:buNone/>
-            </a:pPr>
-            <a:r>
-              <a:rPr lang="en-US" sz="1600" dirty="0">
-                <a:solidFill>
-                  <a:schemeClr val="bg1"/>
-                </a:solidFill>
-              </a:rPr>
-              <a:t>Failles exploitées : …</a:t>
-            </a:r>
-            <a:endParaRPr lang="en-US" sz="1200" dirty="0"/>
-          </a:p>
-          <a:p>
-            <a:pPr indent="0" marL="0">
-              <a:spcAft>
-                <a:spcPts val="1400"/>
-              </a:spcAft>
-              <a:buNone/>
-            </a:pPr>
-            <a:r>
-              <a:rPr lang="en-US" sz="1600" dirty="0">
-                <a:solidFill>
-                  <a:schemeClr val="bg1"/>
-                </a:solidFill>
-              </a:rPr>
-              <a:t>Correctifs appliqués : …</a:t>
-            </a:r>
-            <a:endParaRPr lang="en-US" sz="1200" dirty="0"/>
-          </a:p>
-        </p:txBody>
-      </p:sp>
-      <p:sp>
-        <p:nvSpPr>
-          <p:cNvPr id="25" name="Slide Number Placeholder 0"/>
-          <p:cNvSpPr>
-            <a:spLocks noGrp="1"/>
-          </p:cNvSpPr>
-          <p:nvPr>
-            <p:ph type="sldNum" sz="quarter" idx="4294967295"/>
-          </p:nvPr>
-        </p:nvSpPr>
-        <p:spPr>
-          <a:xfrm>
-            <a:off x="11247120" y="6400800"/>
-            <a:ext cx="457200" cy="274320"/>
-          </a:xfrm>
-          <a:prstGeom prst="rect">
-            <a:avLst/>
-          </a:prstGeom>
-          <a:extLst>
-            <a:ext uri="{C572A759-6A51-4108-AA02-DFA0A04FC94B}">
-              <ma14:wrappingTextBoxFlag xmlns:ma14="http://schemas.microsoft.com/office/mac/drawingml/2011/main" val="0"/>
-            </a:ext>
-          </a:extLst>
-        </p:spPr>
-        <p:txBody>
-          <a:bodyPr/>
-          <a:lstStyle>
-            <a:lvl1pPr>
-              <a:defRPr sz="1000">
-                <a:solidFill>
-                  <a:srgbClr val="6B7886"/>
-                </a:solidFill>
-              </a:defRPr>
-            </a:lvl1pPr>
-          </a:lstStyle>
-          <a:p>
-            <a:pPr algn="r"/>
-            <a:fld id="{F7021451-1387-4CA6-816F-3879F97B5CBC}" type="slidenum">
-              <a:rPr b="0" lang="en-US"/>
               <a:t>12</a:t>
             </a:fld>
             <a:endParaRPr lang="en-US"/>
@@ -5829,7 +5738,7 @@
                   <a:schemeClr val="tx1"/>
                 </a:solidFill>
               </a:rPr>
-              <a:t>Un consortium, deux pôles, un contrat</a:t>
+              <a:t>Auto-audit et pentest croisé</a:t>
             </a:r>
             <a:endParaRPr lang="en-US" sz="3200" dirty="0"/>
           </a:p>
@@ -5837,45 +5746,18 @@
       </p:sp>
       <p:sp>
         <p:nvSpPr>
-          <p:cNvPr id="3" name="pole-infra-fond"/>
+          <p:cNvPr id="3" name="stat-correctifs-fond"/>
           <p:cNvSpPr/>
           <p:nvPr/>
         </p:nvSpPr>
         <p:spPr>
           <a:xfrm>
-            <a:off x="548640" y="1417320"/>
-            <a:ext cx="5394960" cy="2103120"/>
+            <a:off x="548640" y="1463040"/>
+            <a:ext cx="5577840" cy="1234440"/>
           </a:xfrm>
           <a:prstGeom prst="roundRect">
             <a:avLst>
-              <a:gd name="adj" fmla="val 2609"/>
-            </a:avLst>
-          </a:prstGeom>
-          <a:solidFill>
-            <a:schemeClr val="bg2"/>
-          </a:solidFill>
-          <a:ln w="12700">
-            <a:solidFill>
-              <a:schemeClr val="bg2"/>
-            </a:solidFill>
-            <a:prstDash val="solid"/>
-          </a:ln>
-        </p:spPr>
-      </p:sp>
-      <p:sp>
-        <p:nvSpPr>
-          <p:cNvPr id="4" name="pole-infra-entete"/>
-          <p:cNvSpPr/>
-          <p:nvPr/>
-        </p:nvSpPr>
-        <p:spPr>
-          <a:xfrm>
-            <a:off x="548640" y="1417320"/>
-            <a:ext cx="5394960" cy="914400"/>
-          </a:xfrm>
-          <a:prstGeom prst="roundRect">
-            <a:avLst>
-              <a:gd name="adj" fmla="val 6000"/>
+              <a:gd name="adj" fmla="val 4444"/>
             </a:avLst>
           </a:prstGeom>
           <a:solidFill>
@@ -5891,17 +5773,363 @@
       </p:sp>
       <p:sp>
         <p:nvSpPr>
-          <p:cNvPr id="5" name="pole-infra-raccord"/>
+          <p:cNvPr id="4" name="stat-correctifs-texte"/>
+          <p:cNvSpPr txBox="1"/>
+          <p:nvPr/>
+        </p:nvSpPr>
+        <p:spPr>
+          <a:xfrm>
+            <a:off x="731520" y="1572768"/>
+            <a:ext cx="5212080" cy="1014984"/>
+          </a:xfrm>
+          <a:prstGeom prst="rect">
+            <a:avLst/>
+          </a:prstGeom>
+          <a:noFill/>
+          <a:ln/>
+        </p:spPr>
+        <p:txBody>
+          <a:bodyPr wrap="square" lIns="0" tIns="0" rIns="0" bIns="0" rtlCol="0" anchor="t"/>
+          <a:lstStyle/>
+          <a:p>
+            <a:pPr indent="0" marL="0">
+              <a:spcAft>
+                <a:spcPts val="400"/>
+              </a:spcAft>
+              <a:buNone/>
+            </a:pPr>
+            <a:r>
+              <a:rPr lang="en-US" sz="3600" b="1" dirty="0">
+                <a:solidFill>
+                  <a:schemeClr val="accent1"/>
+                </a:solidFill>
+              </a:rPr>
+              <a:t>5 correctifs</a:t>
+            </a:r>
+            <a:endParaRPr lang="en-US" sz="3600" dirty="0"/>
+          </a:p>
+          <a:p>
+            <a:pPr indent="0" marL="0">
+              <a:spcAft>
+                <a:spcPts val="400"/>
+              </a:spcAft>
+              <a:buNone/>
+            </a:pPr>
+            <a:r>
+              <a:rPr lang="en-US" sz="1300" dirty="0">
+                <a:solidFill>
+                  <a:schemeClr val="bg2"/>
+                </a:solidFill>
+              </a:rPr>
+              <a:t>appliqués avant le pentest, après revue de toutes les briques</a:t>
+            </a:r>
+            <a:endParaRPr lang="en-US" sz="3600" dirty="0"/>
+          </a:p>
+        </p:txBody>
+      </p:sp>
+      <p:sp>
+        <p:nvSpPr>
+          <p:cNvPr id="5" name="correctif-1-puce"/>
           <p:cNvSpPr/>
           <p:nvPr/>
         </p:nvSpPr>
         <p:spPr>
           <a:xfrm>
-            <a:off x="548640" y="2221992"/>
-            <a:ext cx="5394960" cy="109728"/>
-          </a:xfrm>
-          <a:prstGeom prst="rect">
-            <a:avLst/>
+            <a:off x="548640" y="2999232"/>
+            <a:ext cx="274320" cy="274320"/>
+          </a:xfrm>
+          <a:prstGeom prst="ellipse">
+            <a:avLst/>
+          </a:prstGeom>
+          <a:solidFill>
+            <a:schemeClr val="accent3"/>
+          </a:solidFill>
+          <a:ln w="12700">
+            <a:solidFill>
+              <a:schemeClr val="accent3"/>
+            </a:solidFill>
+            <a:prstDash val="solid"/>
+          </a:ln>
+        </p:spPr>
+      </p:sp>
+      <p:sp>
+        <p:nvSpPr>
+          <p:cNvPr id="6" name="correctif-1"/>
+          <p:cNvSpPr txBox="1"/>
+          <p:nvPr/>
+        </p:nvSpPr>
+        <p:spPr>
+          <a:xfrm>
+            <a:off x="1005840" y="2926080"/>
+            <a:ext cx="5120640" cy="457200"/>
+          </a:xfrm>
+          <a:prstGeom prst="rect">
+            <a:avLst/>
+          </a:prstGeom>
+          <a:noFill/>
+          <a:ln/>
+        </p:spPr>
+        <p:txBody>
+          <a:bodyPr wrap="square" lIns="0" tIns="0" rIns="0" bIns="0" rtlCol="0" anchor="ctr"/>
+          <a:lstStyle/>
+          <a:p>
+            <a:pPr indent="0" marL="0">
+              <a:buNone/>
+            </a:pPr>
+            <a:r>
+              <a:rPr lang="en-US" sz="1400" b="1" dirty="0">
+                <a:solidFill>
+                  <a:schemeClr val="tx1"/>
+                </a:solidFill>
+              </a:rPr>
+              <a:t>MQTT exclusivement sur TLS : </a:t>
+            </a:r>
+            <a:pPr indent="0" marL="0">
+              <a:buNone/>
+            </a:pPr>
+            <a:r>
+              <a:rPr lang="en-US" sz="1400" dirty="0">
+                <a:solidFill>
+                  <a:schemeClr val="tx2"/>
+                </a:solidFill>
+              </a:rPr>
+              <a:t>le boîtier ne parle plus jamais en clair</a:t>
+            </a:r>
+            <a:endParaRPr lang="en-US" sz="1400" dirty="0"/>
+          </a:p>
+        </p:txBody>
+      </p:sp>
+      <p:sp>
+        <p:nvSpPr>
+          <p:cNvPr id="7" name="correctif-2-puce"/>
+          <p:cNvSpPr/>
+          <p:nvPr/>
+        </p:nvSpPr>
+        <p:spPr>
+          <a:xfrm>
+            <a:off x="548640" y="3685032"/>
+            <a:ext cx="274320" cy="274320"/>
+          </a:xfrm>
+          <a:prstGeom prst="ellipse">
+            <a:avLst/>
+          </a:prstGeom>
+          <a:solidFill>
+            <a:schemeClr val="accent3"/>
+          </a:solidFill>
+          <a:ln w="12700">
+            <a:solidFill>
+              <a:schemeClr val="accent3"/>
+            </a:solidFill>
+            <a:prstDash val="solid"/>
+          </a:ln>
+        </p:spPr>
+      </p:sp>
+      <p:sp>
+        <p:nvSpPr>
+          <p:cNvPr id="8" name="correctif-2"/>
+          <p:cNvSpPr txBox="1"/>
+          <p:nvPr/>
+        </p:nvSpPr>
+        <p:spPr>
+          <a:xfrm>
+            <a:off x="1005840" y="3611880"/>
+            <a:ext cx="5120640" cy="457200"/>
+          </a:xfrm>
+          <a:prstGeom prst="rect">
+            <a:avLst/>
+          </a:prstGeom>
+          <a:noFill/>
+          <a:ln/>
+        </p:spPr>
+        <p:txBody>
+          <a:bodyPr wrap="square" lIns="0" tIns="0" rIns="0" bIns="0" rtlCol="0" anchor="ctr"/>
+          <a:lstStyle/>
+          <a:p>
+            <a:pPr indent="0" marL="0">
+              <a:buNone/>
+            </a:pPr>
+            <a:r>
+              <a:rPr lang="en-US" sz="1400" b="1" dirty="0">
+                <a:solidFill>
+                  <a:schemeClr val="tx1"/>
+                </a:solidFill>
+              </a:rPr>
+              <a:t>Secrets hors du dépôt : </a:t>
+            </a:r>
+            <a:pPr indent="0" marL="0">
+              <a:buNone/>
+            </a:pPr>
+            <a:r>
+              <a:rPr lang="en-US" sz="1400" dirty="0">
+                <a:solidFill>
+                  <a:schemeClr val="tx2"/>
+                </a:solidFill>
+              </a:rPr>
+              <a:t>.env, secrets.h, vault.yml exclus, modèles fournis</a:t>
+            </a:r>
+            <a:endParaRPr lang="en-US" sz="1400" dirty="0"/>
+          </a:p>
+        </p:txBody>
+      </p:sp>
+      <p:sp>
+        <p:nvSpPr>
+          <p:cNvPr id="9" name="correctif-3-puce"/>
+          <p:cNvSpPr/>
+          <p:nvPr/>
+        </p:nvSpPr>
+        <p:spPr>
+          <a:xfrm>
+            <a:off x="548640" y="4370832"/>
+            <a:ext cx="274320" cy="274320"/>
+          </a:xfrm>
+          <a:prstGeom prst="ellipse">
+            <a:avLst/>
+          </a:prstGeom>
+          <a:solidFill>
+            <a:schemeClr val="accent3"/>
+          </a:solidFill>
+          <a:ln w="12700">
+            <a:solidFill>
+              <a:schemeClr val="accent3"/>
+            </a:solidFill>
+            <a:prstDash val="solid"/>
+          </a:ln>
+        </p:spPr>
+      </p:sp>
+      <p:sp>
+        <p:nvSpPr>
+          <p:cNvPr id="10" name="correctif-3"/>
+          <p:cNvSpPr txBox="1"/>
+          <p:nvPr/>
+        </p:nvSpPr>
+        <p:spPr>
+          <a:xfrm>
+            <a:off x="1005840" y="4297680"/>
+            <a:ext cx="5120640" cy="457200"/>
+          </a:xfrm>
+          <a:prstGeom prst="rect">
+            <a:avLst/>
+          </a:prstGeom>
+          <a:noFill/>
+          <a:ln/>
+        </p:spPr>
+        <p:txBody>
+          <a:bodyPr wrap="square" lIns="0" tIns="0" rIns="0" bIns="0" rtlCol="0" anchor="ctr"/>
+          <a:lstStyle/>
+          <a:p>
+            <a:pPr indent="0" marL="0">
+              <a:buNone/>
+            </a:pPr>
+            <a:r>
+              <a:rPr lang="en-US" sz="1400" b="1" dirty="0">
+                <a:solidFill>
+                  <a:schemeClr val="tx1"/>
+                </a:solidFill>
+              </a:rPr>
+              <a:t>Clés obligatoires : </a:t>
+            </a:r>
+            <a:pPr indent="0" marL="0">
+              <a:buNone/>
+            </a:pPr>
+            <a:r>
+              <a:rPr lang="en-US" sz="1400" dirty="0">
+                <a:solidFill>
+                  <a:schemeClr val="tx2"/>
+                </a:solidFill>
+              </a:rPr>
+              <a:t>robot et API refusent de démarrer sans secret</a:t>
+            </a:r>
+            <a:endParaRPr lang="en-US" sz="1400" dirty="0"/>
+          </a:p>
+        </p:txBody>
+      </p:sp>
+      <p:sp>
+        <p:nvSpPr>
+          <p:cNvPr id="11" name="correctif-4-puce"/>
+          <p:cNvSpPr/>
+          <p:nvPr/>
+        </p:nvSpPr>
+        <p:spPr>
+          <a:xfrm>
+            <a:off x="548640" y="5056632"/>
+            <a:ext cx="274320" cy="274320"/>
+          </a:xfrm>
+          <a:prstGeom prst="ellipse">
+            <a:avLst/>
+          </a:prstGeom>
+          <a:solidFill>
+            <a:schemeClr val="accent3"/>
+          </a:solidFill>
+          <a:ln w="12700">
+            <a:solidFill>
+              <a:schemeClr val="accent3"/>
+            </a:solidFill>
+            <a:prstDash val="solid"/>
+          </a:ln>
+        </p:spPr>
+      </p:sp>
+      <p:sp>
+        <p:nvSpPr>
+          <p:cNvPr id="12" name="correctif-4"/>
+          <p:cNvSpPr txBox="1"/>
+          <p:nvPr/>
+        </p:nvSpPr>
+        <p:spPr>
+          <a:xfrm>
+            <a:off x="1005840" y="4983480"/>
+            <a:ext cx="5120640" cy="457200"/>
+          </a:xfrm>
+          <a:prstGeom prst="rect">
+            <a:avLst/>
+          </a:prstGeom>
+          <a:noFill/>
+          <a:ln/>
+        </p:spPr>
+        <p:txBody>
+          <a:bodyPr wrap="square" lIns="0" tIns="0" rIns="0" bIns="0" rtlCol="0" anchor="ctr"/>
+          <a:lstStyle/>
+          <a:p>
+            <a:pPr indent="0" marL="0">
+              <a:buNone/>
+            </a:pPr>
+            <a:r>
+              <a:rPr lang="en-US" sz="1400" b="1" dirty="0">
+                <a:solidFill>
+                  <a:schemeClr val="tx1"/>
+                </a:solidFill>
+              </a:rPr>
+              <a:t>Flux annoté au dashboard : </a:t>
+            </a:r>
+            <a:pPr indent="0" marL="0">
+              <a:buNone/>
+            </a:pPr>
+            <a:r>
+              <a:rPr lang="en-US" sz="1400" dirty="0">
+                <a:solidFill>
+                  <a:schemeClr val="tx2"/>
+                </a:solidFill>
+              </a:rPr>
+              <a:t>l'API relaie le flux YOLO, robot en repli</a:t>
+            </a:r>
+            <a:endParaRPr lang="en-US" sz="1400" dirty="0"/>
+          </a:p>
+        </p:txBody>
+      </p:sp>
+      <p:sp>
+        <p:nvSpPr>
+          <p:cNvPr id="13" name="pentest-fond"/>
+          <p:cNvSpPr/>
+          <p:nvPr/>
+        </p:nvSpPr>
+        <p:spPr>
+          <a:xfrm>
+            <a:off x="6492240" y="1463040"/>
+            <a:ext cx="5120640" cy="4160520"/>
+          </a:xfrm>
+          <a:prstGeom prst="roundRect">
+            <a:avLst>
+              <a:gd name="adj" fmla="val 1319"/>
+            </a:avLst>
           </a:prstGeom>
           <a:solidFill>
             <a:schemeClr val="tx1"/>
@@ -5916,14 +6144,14 @@
       </p:sp>
       <p:sp>
         <p:nvSpPr>
-          <p:cNvPr id="6" name="pole-infra-titre"/>
+          <p:cNvPr id="14" name="pentest-resultats"/>
           <p:cNvSpPr txBox="1"/>
           <p:nvPr/>
         </p:nvSpPr>
         <p:spPr>
           <a:xfrm>
-            <a:off x="731520" y="1490472"/>
-            <a:ext cx="5029200" cy="768096"/>
+            <a:off x="6720840" y="1645920"/>
+            <a:ext cx="4663440" cy="3794760"/>
           </a:xfrm>
           <a:prstGeom prst="rect">
             <a:avLst/>
@@ -5932,614 +6160,92 @@
           <a:ln/>
         </p:spPr>
         <p:txBody>
-          <a:bodyPr wrap="square" lIns="0" tIns="0" rIns="0" bIns="0" rtlCol="0" anchor="ctr"/>
-          <a:lstStyle/>
-          <a:p>
-            <a:pPr indent="0" marL="0">
-              <a:buNone/>
-            </a:pPr>
-            <a:r>
-              <a:rPr lang="en-US" sz="1100" b="1" spc="200" kern="0" dirty="0">
+          <a:bodyPr wrap="square" lIns="0" tIns="0" rIns="0" bIns="0" rtlCol="0" anchor="t"/>
+          <a:lstStyle/>
+          <a:p>
+            <a:pPr indent="0" marL="0">
+              <a:spcAft>
+                <a:spcPts val="1400"/>
+              </a:spcAft>
+              <a:buNone/>
+            </a:pPr>
+            <a:r>
+              <a:rPr lang="en-US" sz="1200" b="1" spc="200" kern="0" dirty="0">
                 <a:solidFill>
                   <a:schemeClr val="accent1"/>
                 </a:solidFill>
               </a:rPr>
-              <a:t>PÔLE INFRA</a:t>
-            </a:r>
-            <a:endParaRPr lang="en-US" sz="1100" dirty="0"/>
-          </a:p>
-          <a:p>
-            <a:pPr indent="0" marL="0">
-              <a:buNone/>
-            </a:pPr>
-            <a:r>
-              <a:rPr lang="en-US" sz="1800" b="1" dirty="0">
+              <a:t>PENTEST CROISÉ · 8 OCTOBRE</a:t>
+            </a:r>
+            <a:endParaRPr lang="en-US" sz="1200" dirty="0"/>
+          </a:p>
+          <a:p>
+            <a:pPr indent="0" marL="0">
+              <a:spcAft>
+                <a:spcPts val="1400"/>
+              </a:spcAft>
+              <a:buNone/>
+            </a:pPr>
+            <a:r>
+              <a:rPr lang="en-US" sz="1600" dirty="0">
                 <a:solidFill>
                   <a:schemeClr val="bg1"/>
                 </a:solidFill>
               </a:rPr>
-              <a:t>Elios · Benoit</a:t>
-            </a:r>
-            <a:endParaRPr lang="en-US" sz="1100" dirty="0"/>
-          </a:p>
-        </p:txBody>
-      </p:sp>
-      <p:sp>
-        <p:nvSpPr>
-          <p:cNvPr id="7" name="pole-infra-texte"/>
-          <p:cNvSpPr txBox="1"/>
-          <p:nvPr/>
-        </p:nvSpPr>
-        <p:spPr>
-          <a:xfrm>
-            <a:off x="731520" y="2468880"/>
-            <a:ext cx="5029200" cy="914400"/>
-          </a:xfrm>
-          <a:prstGeom prst="rect">
-            <a:avLst/>
-          </a:prstGeom>
-          <a:noFill/>
-          <a:ln/>
-        </p:spPr>
-        <p:txBody>
-          <a:bodyPr wrap="square" lIns="0" tIns="0" rIns="0" bIns="0" rtlCol="0" anchor="t"/>
-          <a:lstStyle/>
-          <a:p>
-            <a:pPr indent="0" marL="0">
-              <a:buNone/>
-            </a:pPr>
-            <a:r>
-              <a:rPr lang="en-US" sz="1500" dirty="0">
-                <a:solidFill>
-                  <a:schemeClr val="tx1"/>
-                </a:solidFill>
-              </a:rPr>
-              <a:t>Proxmox et VLAN, Galera et HAProxy, Mosquitto et TLS, Ansible, Zabbix, durcissement.</a:t>
-            </a:r>
-            <a:endParaRPr lang="en-US" sz="1500" dirty="0"/>
-          </a:p>
-        </p:txBody>
-      </p:sp>
-      <p:sp>
-        <p:nvSpPr>
-          <p:cNvPr id="8" name="pole-dev-fond"/>
-          <p:cNvSpPr/>
-          <p:nvPr/>
-        </p:nvSpPr>
-        <p:spPr>
-          <a:xfrm>
-            <a:off x="6217920" y="1417320"/>
-            <a:ext cx="5394960" cy="2103120"/>
-          </a:xfrm>
-          <a:prstGeom prst="roundRect">
-            <a:avLst>
-              <a:gd name="adj" fmla="val 2609"/>
-            </a:avLst>
-          </a:prstGeom>
-          <a:solidFill>
-            <a:schemeClr val="bg2"/>
-          </a:solidFill>
-          <a:ln w="12700">
-            <a:solidFill>
-              <a:schemeClr val="bg2"/>
-            </a:solidFill>
-            <a:prstDash val="solid"/>
-          </a:ln>
-        </p:spPr>
-      </p:sp>
-      <p:sp>
-        <p:nvSpPr>
-          <p:cNvPr id="9" name="pole-dev-entete"/>
-          <p:cNvSpPr/>
-          <p:nvPr/>
-        </p:nvSpPr>
-        <p:spPr>
-          <a:xfrm>
-            <a:off x="6217920" y="1417320"/>
-            <a:ext cx="5394960" cy="914400"/>
-          </a:xfrm>
-          <a:prstGeom prst="roundRect">
-            <a:avLst>
-              <a:gd name="adj" fmla="val 6000"/>
-            </a:avLst>
-          </a:prstGeom>
-          <a:solidFill>
-            <a:schemeClr val="tx1"/>
-          </a:solidFill>
-          <a:ln w="12700">
-            <a:solidFill>
-              <a:schemeClr val="tx1"/>
-            </a:solidFill>
-            <a:prstDash val="solid"/>
-          </a:ln>
-        </p:spPr>
-      </p:sp>
-      <p:sp>
-        <p:nvSpPr>
-          <p:cNvPr id="10" name="pole-dev-raccord"/>
-          <p:cNvSpPr/>
-          <p:nvPr/>
-        </p:nvSpPr>
-        <p:spPr>
-          <a:xfrm>
-            <a:off x="6217920" y="2221992"/>
-            <a:ext cx="5394960" cy="109728"/>
-          </a:xfrm>
-          <a:prstGeom prst="rect">
-            <a:avLst/>
-          </a:prstGeom>
-          <a:solidFill>
-            <a:schemeClr val="tx1"/>
-          </a:solidFill>
-          <a:ln w="12700">
-            <a:solidFill>
-              <a:schemeClr val="tx1"/>
-            </a:solidFill>
-            <a:prstDash val="solid"/>
-          </a:ln>
-        </p:spPr>
-      </p:sp>
-      <p:sp>
-        <p:nvSpPr>
-          <p:cNvPr id="11" name="pole-dev-titre"/>
-          <p:cNvSpPr txBox="1"/>
-          <p:nvPr/>
-        </p:nvSpPr>
-        <p:spPr>
-          <a:xfrm>
-            <a:off x="6400800" y="1490472"/>
-            <a:ext cx="5029200" cy="768096"/>
-          </a:xfrm>
-          <a:prstGeom prst="rect">
-            <a:avLst/>
-          </a:prstGeom>
-          <a:noFill/>
-          <a:ln/>
-        </p:spPr>
-        <p:txBody>
-          <a:bodyPr wrap="square" lIns="0" tIns="0" rIns="0" bIns="0" rtlCol="0" anchor="ctr"/>
-          <a:lstStyle/>
-          <a:p>
-            <a:pPr indent="0" marL="0">
-              <a:buNone/>
-            </a:pPr>
-            <a:r>
-              <a:rPr lang="en-US" sz="1100" b="1" spc="200" kern="0" dirty="0">
-                <a:solidFill>
-                  <a:schemeClr val="accent1"/>
-                </a:solidFill>
-              </a:rPr>
-              <a:t>PÔLE DEV</a:t>
-            </a:r>
-            <a:endParaRPr lang="en-US" sz="1100" dirty="0"/>
-          </a:p>
-          <a:p>
-            <a:pPr indent="0" marL="0">
-              <a:buNone/>
-            </a:pPr>
-            <a:r>
-              <a:rPr lang="en-US" sz="1800" b="1" dirty="0">
+              <a:t>Attaques subies : …</a:t>
+            </a:r>
+            <a:endParaRPr lang="en-US" sz="1200" dirty="0"/>
+          </a:p>
+          <a:p>
+            <a:pPr indent="0" marL="0">
+              <a:spcAft>
+                <a:spcPts val="1400"/>
+              </a:spcAft>
+              <a:buNone/>
+            </a:pPr>
+            <a:r>
+              <a:rPr lang="en-US" sz="1600" dirty="0">
                 <a:solidFill>
                   <a:schemeClr val="bg1"/>
                 </a:solidFill>
               </a:rPr>
-              <a:t>Felis · Martin · Matis</a:t>
-            </a:r>
-            <a:endParaRPr lang="en-US" sz="1100" dirty="0"/>
-          </a:p>
-        </p:txBody>
-      </p:sp>
-      <p:sp>
-        <p:nvSpPr>
-          <p:cNvPr id="12" name="pole-dev-texte"/>
-          <p:cNvSpPr txBox="1"/>
-          <p:nvPr/>
-        </p:nvSpPr>
-        <p:spPr>
-          <a:xfrm>
-            <a:off x="6400800" y="2468880"/>
-            <a:ext cx="5029200" cy="914400"/>
-          </a:xfrm>
-          <a:prstGeom prst="rect">
-            <a:avLst/>
-          </a:prstGeom>
-          <a:noFill/>
-          <a:ln/>
-        </p:spPr>
-        <p:txBody>
-          <a:bodyPr wrap="square" lIns="0" tIns="0" rIns="0" bIns="0" rtlCol="0" anchor="t"/>
-          <a:lstStyle/>
-          <a:p>
-            <a:pPr indent="0" marL="0">
-              <a:buNone/>
-            </a:pPr>
-            <a:r>
-              <a:rPr lang="en-US" sz="1500" dirty="0">
-                <a:solidFill>
-                  <a:schemeClr val="tx1"/>
-                </a:solidFill>
-              </a:rPr>
-              <a:t>Firmware ESP8266, API, dashboard React, IA de vision et prédictive, robot Yanshee.</a:t>
-            </a:r>
-            <a:endParaRPr lang="en-US" sz="1500" dirty="0"/>
-          </a:p>
-        </p:txBody>
-      </p:sp>
-      <p:sp>
-        <p:nvSpPr>
-          <p:cNvPr id="13" name="jour-1-tag"/>
-          <p:cNvSpPr txBox="1"/>
-          <p:nvPr/>
-        </p:nvSpPr>
-        <p:spPr>
-          <a:xfrm>
-            <a:off x="548640" y="3931920"/>
-            <a:ext cx="502920" cy="384048"/>
-          </a:xfrm>
-          <a:prstGeom prst="roundRect">
-            <a:avLst>
-              <a:gd name="adj" fmla="val 11905"/>
-            </a:avLst>
-          </a:prstGeom>
-          <a:solidFill>
-            <a:schemeClr val="tx1"/>
-          </a:solidFill>
-          <a:ln/>
-        </p:spPr>
-        <p:txBody>
-          <a:bodyPr wrap="square" lIns="0" tIns="0" rIns="0" bIns="0" rtlCol="0" anchor="ctr"/>
-          <a:lstStyle/>
-          <a:p>
-            <a:pPr algn="ctr" indent="0" marL="0">
-              <a:buNone/>
-            </a:pPr>
-            <a:r>
-              <a:rPr lang="en-US" sz="1400" b="1" dirty="0">
-                <a:solidFill>
-                  <a:schemeClr val="accent1"/>
-                </a:solidFill>
-              </a:rPr>
-              <a:t>Lun</a:t>
-            </a:r>
-            <a:endParaRPr lang="en-US" sz="1400" dirty="0"/>
-          </a:p>
-        </p:txBody>
-      </p:sp>
-      <p:sp>
-        <p:nvSpPr>
-          <p:cNvPr id="14" name="jour-1"/>
-          <p:cNvSpPr txBox="1"/>
-          <p:nvPr/>
-        </p:nvSpPr>
-        <p:spPr>
-          <a:xfrm>
-            <a:off x="1188720" y="3886200"/>
-            <a:ext cx="2103120" cy="822960"/>
-          </a:xfrm>
-          <a:prstGeom prst="rect">
-            <a:avLst/>
-          </a:prstGeom>
-          <a:noFill/>
-          <a:ln/>
-        </p:spPr>
-        <p:txBody>
-          <a:bodyPr wrap="square" lIns="0" tIns="0" rIns="0" bIns="0" rtlCol="0" anchor="t"/>
-          <a:lstStyle/>
-          <a:p>
-            <a:pPr indent="0" marL="0">
-              <a:buNone/>
-            </a:pPr>
-            <a:r>
-              <a:rPr lang="en-US" sz="1300" dirty="0">
-                <a:solidFill>
-                  <a:schemeClr val="tx1"/>
-                </a:solidFill>
-              </a:rPr>
-              <a:t>Contrat d'interface figé, plan IP, VM</a:t>
-            </a:r>
-            <a:endParaRPr lang="en-US" sz="1300" dirty="0"/>
-          </a:p>
-        </p:txBody>
-      </p:sp>
-      <p:sp>
-        <p:nvSpPr>
-          <p:cNvPr id="15" name="jour-2-tag"/>
-          <p:cNvSpPr txBox="1"/>
-          <p:nvPr/>
-        </p:nvSpPr>
-        <p:spPr>
-          <a:xfrm>
-            <a:off x="3383280" y="3931920"/>
-            <a:ext cx="502920" cy="384048"/>
-          </a:xfrm>
-          <a:prstGeom prst="roundRect">
-            <a:avLst>
-              <a:gd name="adj" fmla="val 11905"/>
-            </a:avLst>
-          </a:prstGeom>
-          <a:solidFill>
-            <a:schemeClr val="tx1"/>
-          </a:solidFill>
-          <a:ln/>
-        </p:spPr>
-        <p:txBody>
-          <a:bodyPr wrap="square" lIns="0" tIns="0" rIns="0" bIns="0" rtlCol="0" anchor="ctr"/>
-          <a:lstStyle/>
-          <a:p>
-            <a:pPr algn="ctr" indent="0" marL="0">
-              <a:buNone/>
-            </a:pPr>
-            <a:r>
-              <a:rPr lang="en-US" sz="1400" b="1" dirty="0">
-                <a:solidFill>
-                  <a:schemeClr val="accent1"/>
-                </a:solidFill>
-              </a:rPr>
-              <a:t>Mar</a:t>
-            </a:r>
-            <a:endParaRPr lang="en-US" sz="1400" dirty="0"/>
-          </a:p>
-        </p:txBody>
-      </p:sp>
-      <p:sp>
-        <p:nvSpPr>
-          <p:cNvPr id="16" name="jour-2"/>
-          <p:cNvSpPr txBox="1"/>
-          <p:nvPr/>
-        </p:nvSpPr>
-        <p:spPr>
-          <a:xfrm>
-            <a:off x="4023360" y="3886200"/>
-            <a:ext cx="2103120" cy="822960"/>
-          </a:xfrm>
-          <a:prstGeom prst="rect">
-            <a:avLst/>
-          </a:prstGeom>
-          <a:noFill/>
-          <a:ln/>
-        </p:spPr>
-        <p:txBody>
-          <a:bodyPr wrap="square" lIns="0" tIns="0" rIns="0" bIns="0" rtlCol="0" anchor="t"/>
-          <a:lstStyle/>
-          <a:p>
-            <a:pPr indent="0" marL="0">
-              <a:buNone/>
-            </a:pPr>
-            <a:r>
-              <a:rPr lang="en-US" sz="1300" dirty="0">
-                <a:solidFill>
-                  <a:schemeClr val="tx1"/>
-                </a:solidFill>
-              </a:rPr>
-              <a:t>Câblage, firmware, broker, Galera, API</a:t>
-            </a:r>
-            <a:endParaRPr lang="en-US" sz="1300" dirty="0"/>
-          </a:p>
-        </p:txBody>
-      </p:sp>
-      <p:sp>
-        <p:nvSpPr>
-          <p:cNvPr id="17" name="jour-3-tag"/>
-          <p:cNvSpPr txBox="1"/>
-          <p:nvPr/>
-        </p:nvSpPr>
-        <p:spPr>
-          <a:xfrm>
-            <a:off x="6217920" y="3931920"/>
-            <a:ext cx="502920" cy="384048"/>
-          </a:xfrm>
-          <a:prstGeom prst="roundRect">
-            <a:avLst>
-              <a:gd name="adj" fmla="val 11905"/>
-            </a:avLst>
-          </a:prstGeom>
-          <a:solidFill>
-            <a:schemeClr val="tx1"/>
-          </a:solidFill>
-          <a:ln/>
-        </p:spPr>
-        <p:txBody>
-          <a:bodyPr wrap="square" lIns="0" tIns="0" rIns="0" bIns="0" rtlCol="0" anchor="ctr"/>
-          <a:lstStyle/>
-          <a:p>
-            <a:pPr algn="ctr" indent="0" marL="0">
-              <a:buNone/>
-            </a:pPr>
-            <a:r>
-              <a:rPr lang="en-US" sz="1400" b="1" dirty="0">
-                <a:solidFill>
-                  <a:schemeClr val="accent1"/>
-                </a:solidFill>
-              </a:rPr>
-              <a:t>Mer</a:t>
-            </a:r>
-            <a:endParaRPr lang="en-US" sz="1400" dirty="0"/>
-          </a:p>
-        </p:txBody>
-      </p:sp>
-      <p:sp>
-        <p:nvSpPr>
-          <p:cNvPr id="18" name="jour-3"/>
-          <p:cNvSpPr txBox="1"/>
-          <p:nvPr/>
-        </p:nvSpPr>
-        <p:spPr>
-          <a:xfrm>
-            <a:off x="6858000" y="3886200"/>
-            <a:ext cx="2103120" cy="822960"/>
-          </a:xfrm>
-          <a:prstGeom prst="rect">
-            <a:avLst/>
-          </a:prstGeom>
-          <a:noFill/>
-          <a:ln/>
-        </p:spPr>
-        <p:txBody>
-          <a:bodyPr wrap="square" lIns="0" tIns="0" rIns="0" bIns="0" rtlCol="0" anchor="t"/>
-          <a:lstStyle/>
-          <a:p>
-            <a:pPr indent="0" marL="0">
-              <a:buNone/>
-            </a:pPr>
-            <a:r>
-              <a:rPr lang="en-US" sz="1300" dirty="0">
-                <a:solidFill>
-                  <a:schemeClr val="tx1"/>
-                </a:solidFill>
-              </a:rPr>
-              <a:t>Bout en bout, IA, robot, tournage</a:t>
-            </a:r>
-            <a:endParaRPr lang="en-US" sz="1300" dirty="0"/>
-          </a:p>
-        </p:txBody>
-      </p:sp>
-      <p:sp>
-        <p:nvSpPr>
-          <p:cNvPr id="19" name="jour-4-tag"/>
-          <p:cNvSpPr txBox="1"/>
-          <p:nvPr/>
-        </p:nvSpPr>
-        <p:spPr>
-          <a:xfrm>
-            <a:off x="9052560" y="3931920"/>
-            <a:ext cx="502920" cy="384048"/>
-          </a:xfrm>
-          <a:prstGeom prst="roundRect">
-            <a:avLst>
-              <a:gd name="adj" fmla="val 11905"/>
-            </a:avLst>
-          </a:prstGeom>
-          <a:solidFill>
-            <a:schemeClr val="tx1"/>
-          </a:solidFill>
-          <a:ln/>
-        </p:spPr>
-        <p:txBody>
-          <a:bodyPr wrap="square" lIns="0" tIns="0" rIns="0" bIns="0" rtlCol="0" anchor="ctr"/>
-          <a:lstStyle/>
-          <a:p>
-            <a:pPr algn="ctr" indent="0" marL="0">
-              <a:buNone/>
-            </a:pPr>
-            <a:r>
-              <a:rPr lang="en-US" sz="1400" b="1" dirty="0">
-                <a:solidFill>
-                  <a:schemeClr val="accent1"/>
-                </a:solidFill>
-              </a:rPr>
-              <a:t>Jeu</a:t>
-            </a:r>
-            <a:endParaRPr lang="en-US" sz="1400" dirty="0"/>
-          </a:p>
-        </p:txBody>
-      </p:sp>
-      <p:sp>
-        <p:nvSpPr>
-          <p:cNvPr id="20" name="jour-4"/>
-          <p:cNvSpPr txBox="1"/>
-          <p:nvPr/>
-        </p:nvSpPr>
-        <p:spPr>
-          <a:xfrm>
-            <a:off x="9692640" y="3886200"/>
-            <a:ext cx="2103120" cy="822960"/>
-          </a:xfrm>
-          <a:prstGeom prst="rect">
-            <a:avLst/>
-          </a:prstGeom>
-          <a:noFill/>
-          <a:ln/>
-        </p:spPr>
-        <p:txBody>
-          <a:bodyPr wrap="square" lIns="0" tIns="0" rIns="0" bIns="0" rtlCol="0" anchor="t"/>
-          <a:lstStyle/>
-          <a:p>
-            <a:pPr indent="0" marL="0">
-              <a:buNone/>
-            </a:pPr>
-            <a:r>
-              <a:rPr lang="en-US" sz="1300" dirty="0">
-                <a:solidFill>
-                  <a:schemeClr val="tx1"/>
-                </a:solidFill>
-              </a:rPr>
-              <a:t>TLS seul, secrets, audit, pentest</a:t>
-            </a:r>
-            <a:endParaRPr lang="en-US" sz="1300" dirty="0"/>
-          </a:p>
-        </p:txBody>
-      </p:sp>
-      <p:sp>
-        <p:nvSpPr>
-          <p:cNvPr id="21" name="methode-fond"/>
-          <p:cNvSpPr/>
-          <p:nvPr/>
-        </p:nvSpPr>
-        <p:spPr>
-          <a:xfrm>
-            <a:off x="548640" y="5074920"/>
-            <a:ext cx="11064240" cy="640080"/>
-          </a:xfrm>
-          <a:prstGeom prst="roundRect">
-            <a:avLst>
-              <a:gd name="adj" fmla="val 7143"/>
-            </a:avLst>
-          </a:prstGeom>
-          <a:solidFill>
-            <a:srgbClr val="F1F4F6"/>
-          </a:solidFill>
-          <a:ln w="12700">
-            <a:solidFill>
-              <a:srgbClr val="F1F4F6"/>
-            </a:solidFill>
-            <a:prstDash val="solid"/>
-          </a:ln>
-        </p:spPr>
-      </p:sp>
-      <p:sp>
-        <p:nvSpPr>
-          <p:cNvPr id="22" name="methode"/>
-          <p:cNvSpPr txBox="1"/>
-          <p:nvPr/>
-        </p:nvSpPr>
-        <p:spPr>
-          <a:xfrm>
-            <a:off x="777240" y="5074920"/>
-            <a:ext cx="10607040" cy="640080"/>
-          </a:xfrm>
-          <a:prstGeom prst="rect">
-            <a:avLst/>
-          </a:prstGeom>
-          <a:noFill/>
-          <a:ln/>
-        </p:spPr>
-        <p:txBody>
-          <a:bodyPr wrap="square" lIns="0" tIns="0" rIns="0" bIns="0" rtlCol="0" anchor="ctr"/>
-          <a:lstStyle/>
-          <a:p>
-            <a:pPr indent="0" marL="0">
-              <a:buNone/>
-            </a:pPr>
-            <a:r>
-              <a:rPr lang="en-US" sz="1400" b="1" dirty="0">
-                <a:solidFill>
-                  <a:schemeClr val="tx1"/>
-                </a:solidFill>
-              </a:rPr>
-              <a:t>Méthode : </a:t>
-            </a:r>
-            <a:pPr indent="0" marL="0">
-              <a:buNone/>
-            </a:pPr>
-            <a:r>
-              <a:rPr lang="en-US" sz="1400" dirty="0">
-                <a:solidFill>
-                  <a:schemeClr val="tx1"/>
-                </a:solidFill>
-              </a:rPr>
-              <a:t>Jira pour les tâches · une branche par brique, fusion par pull request · commits sémantiques · tests automatisés sur l'API et les IA</a:t>
-            </a:r>
-            <a:endParaRPr lang="en-US" sz="1400" dirty="0"/>
+              <a:t>Attaques bloquées : …</a:t>
+            </a:r>
+            <a:endParaRPr lang="en-US" sz="1200" dirty="0"/>
+          </a:p>
+          <a:p>
+            <a:pPr indent="0" marL="0">
+              <a:spcAft>
+                <a:spcPts val="1400"/>
+              </a:spcAft>
+              <a:buNone/>
+            </a:pPr>
+            <a:r>
+              <a:rPr lang="en-US" sz="1600" dirty="0">
+                <a:solidFill>
+                  <a:schemeClr val="bg1"/>
+                </a:solidFill>
+              </a:rPr>
+              <a:t>Failles exploitées : …</a:t>
+            </a:r>
+            <a:endParaRPr lang="en-US" sz="1200" dirty="0"/>
+          </a:p>
+          <a:p>
+            <a:pPr indent="0" marL="0">
+              <a:spcAft>
+                <a:spcPts val="1400"/>
+              </a:spcAft>
+              <a:buNone/>
+            </a:pPr>
+            <a:r>
+              <a:rPr lang="en-US" sz="1600" dirty="0">
+                <a:solidFill>
+                  <a:schemeClr val="bg1"/>
+                </a:solidFill>
+              </a:rPr>
+              <a:t>Correctifs appliqués : …</a:t>
+            </a:r>
+            <a:endParaRPr lang="en-US" sz="1200" dirty="0"/>
           </a:p>
         </p:txBody>
       </p:sp>
@@ -6618,6 +6324,822 @@
           <p:cNvPr id="2" name="Text 0"/>
           <p:cNvSpPr/>
           <p:nvPr>
+            <p:ph idx="100" type="title" hasCustomPrompt="1"/>
+          </p:nvPr>
+        </p:nvSpPr>
+        <p:spPr>
+          <a:xfrm>
+            <a:off x="548640" y="320040"/>
+            <a:ext cx="11064240" cy="777240"/>
+          </a:xfrm>
+          <a:prstGeom prst="rect">
+            <a:avLst/>
+          </a:prstGeom>
+          <a:noFill/>
+          <a:ln/>
+        </p:spPr>
+        <p:txBody>
+          <a:bodyPr wrap="square" lIns="0" tIns="0" rIns="0" bIns="0" rtlCol="0" anchor="ctr"/>
+          <a:lstStyle/>
+          <a:p>
+            <a:pPr algn="l" indent="0" marL="0">
+              <a:buNone/>
+            </a:pPr>
+            <a:r>
+              <a:rPr lang="en-US" sz="3200" b="1" dirty="0">
+                <a:solidFill>
+                  <a:schemeClr val="tx1"/>
+                </a:solidFill>
+              </a:rPr>
+              <a:t>Un consortium, deux pôles, un contrat</a:t>
+            </a:r>
+            <a:endParaRPr lang="en-US" sz="3200" dirty="0"/>
+          </a:p>
+        </p:txBody>
+      </p:sp>
+      <p:sp>
+        <p:nvSpPr>
+          <p:cNvPr id="3" name="pole-infra-fond"/>
+          <p:cNvSpPr/>
+          <p:nvPr/>
+        </p:nvSpPr>
+        <p:spPr>
+          <a:xfrm>
+            <a:off x="548640" y="1417320"/>
+            <a:ext cx="5394960" cy="2103120"/>
+          </a:xfrm>
+          <a:prstGeom prst="roundRect">
+            <a:avLst>
+              <a:gd name="adj" fmla="val 2609"/>
+            </a:avLst>
+          </a:prstGeom>
+          <a:solidFill>
+            <a:schemeClr val="bg2"/>
+          </a:solidFill>
+          <a:ln w="12700">
+            <a:solidFill>
+              <a:schemeClr val="bg2"/>
+            </a:solidFill>
+            <a:prstDash val="solid"/>
+          </a:ln>
+        </p:spPr>
+      </p:sp>
+      <p:sp>
+        <p:nvSpPr>
+          <p:cNvPr id="4" name="pole-infra-entete"/>
+          <p:cNvSpPr/>
+          <p:nvPr/>
+        </p:nvSpPr>
+        <p:spPr>
+          <a:xfrm>
+            <a:off x="548640" y="1417320"/>
+            <a:ext cx="5394960" cy="914400"/>
+          </a:xfrm>
+          <a:prstGeom prst="roundRect">
+            <a:avLst>
+              <a:gd name="adj" fmla="val 6000"/>
+            </a:avLst>
+          </a:prstGeom>
+          <a:solidFill>
+            <a:schemeClr val="tx1"/>
+          </a:solidFill>
+          <a:ln w="12700">
+            <a:solidFill>
+              <a:schemeClr val="tx1"/>
+            </a:solidFill>
+            <a:prstDash val="solid"/>
+          </a:ln>
+        </p:spPr>
+      </p:sp>
+      <p:sp>
+        <p:nvSpPr>
+          <p:cNvPr id="5" name="pole-infra-raccord"/>
+          <p:cNvSpPr/>
+          <p:nvPr/>
+        </p:nvSpPr>
+        <p:spPr>
+          <a:xfrm>
+            <a:off x="548640" y="2221992"/>
+            <a:ext cx="5394960" cy="109728"/>
+          </a:xfrm>
+          <a:prstGeom prst="rect">
+            <a:avLst/>
+          </a:prstGeom>
+          <a:solidFill>
+            <a:schemeClr val="tx1"/>
+          </a:solidFill>
+          <a:ln w="12700">
+            <a:solidFill>
+              <a:schemeClr val="tx1"/>
+            </a:solidFill>
+            <a:prstDash val="solid"/>
+          </a:ln>
+        </p:spPr>
+      </p:sp>
+      <p:sp>
+        <p:nvSpPr>
+          <p:cNvPr id="6" name="pole-infra-titre"/>
+          <p:cNvSpPr txBox="1"/>
+          <p:nvPr/>
+        </p:nvSpPr>
+        <p:spPr>
+          <a:xfrm>
+            <a:off x="731520" y="1490472"/>
+            <a:ext cx="5029200" cy="768096"/>
+          </a:xfrm>
+          <a:prstGeom prst="rect">
+            <a:avLst/>
+          </a:prstGeom>
+          <a:noFill/>
+          <a:ln/>
+        </p:spPr>
+        <p:txBody>
+          <a:bodyPr wrap="square" lIns="0" tIns="0" rIns="0" bIns="0" rtlCol="0" anchor="ctr"/>
+          <a:lstStyle/>
+          <a:p>
+            <a:pPr indent="0" marL="0">
+              <a:buNone/>
+            </a:pPr>
+            <a:r>
+              <a:rPr lang="en-US" sz="1100" b="1" spc="200" kern="0" dirty="0">
+                <a:solidFill>
+                  <a:schemeClr val="accent1"/>
+                </a:solidFill>
+              </a:rPr>
+              <a:t>PÔLE INFRA</a:t>
+            </a:r>
+            <a:endParaRPr lang="en-US" sz="1100" dirty="0"/>
+          </a:p>
+          <a:p>
+            <a:pPr indent="0" marL="0">
+              <a:buNone/>
+            </a:pPr>
+            <a:r>
+              <a:rPr lang="en-US" sz="1800" b="1" dirty="0">
+                <a:solidFill>
+                  <a:schemeClr val="bg1"/>
+                </a:solidFill>
+              </a:rPr>
+              <a:t>Elios · Benoit</a:t>
+            </a:r>
+            <a:endParaRPr lang="en-US" sz="1100" dirty="0"/>
+          </a:p>
+        </p:txBody>
+      </p:sp>
+      <p:sp>
+        <p:nvSpPr>
+          <p:cNvPr id="7" name="pole-infra-texte"/>
+          <p:cNvSpPr txBox="1"/>
+          <p:nvPr/>
+        </p:nvSpPr>
+        <p:spPr>
+          <a:xfrm>
+            <a:off x="731520" y="2468880"/>
+            <a:ext cx="5029200" cy="914400"/>
+          </a:xfrm>
+          <a:prstGeom prst="rect">
+            <a:avLst/>
+          </a:prstGeom>
+          <a:noFill/>
+          <a:ln/>
+        </p:spPr>
+        <p:txBody>
+          <a:bodyPr wrap="square" lIns="0" tIns="0" rIns="0" bIns="0" rtlCol="0" anchor="t"/>
+          <a:lstStyle/>
+          <a:p>
+            <a:pPr indent="0" marL="0">
+              <a:buNone/>
+            </a:pPr>
+            <a:r>
+              <a:rPr lang="en-US" sz="1500" dirty="0">
+                <a:solidFill>
+                  <a:schemeClr val="tx1"/>
+                </a:solidFill>
+              </a:rPr>
+              <a:t>Proxmox et VLAN, Galera et HAProxy, Mosquitto et TLS, Ansible, Zabbix, durcissement.</a:t>
+            </a:r>
+            <a:endParaRPr lang="en-US" sz="1500" dirty="0"/>
+          </a:p>
+        </p:txBody>
+      </p:sp>
+      <p:sp>
+        <p:nvSpPr>
+          <p:cNvPr id="8" name="pole-dev-fond"/>
+          <p:cNvSpPr/>
+          <p:nvPr/>
+        </p:nvSpPr>
+        <p:spPr>
+          <a:xfrm>
+            <a:off x="6217920" y="1417320"/>
+            <a:ext cx="5394960" cy="2103120"/>
+          </a:xfrm>
+          <a:prstGeom prst="roundRect">
+            <a:avLst>
+              <a:gd name="adj" fmla="val 2609"/>
+            </a:avLst>
+          </a:prstGeom>
+          <a:solidFill>
+            <a:schemeClr val="bg2"/>
+          </a:solidFill>
+          <a:ln w="12700">
+            <a:solidFill>
+              <a:schemeClr val="bg2"/>
+            </a:solidFill>
+            <a:prstDash val="solid"/>
+          </a:ln>
+        </p:spPr>
+      </p:sp>
+      <p:sp>
+        <p:nvSpPr>
+          <p:cNvPr id="9" name="pole-dev-entete"/>
+          <p:cNvSpPr/>
+          <p:nvPr/>
+        </p:nvSpPr>
+        <p:spPr>
+          <a:xfrm>
+            <a:off x="6217920" y="1417320"/>
+            <a:ext cx="5394960" cy="914400"/>
+          </a:xfrm>
+          <a:prstGeom prst="roundRect">
+            <a:avLst>
+              <a:gd name="adj" fmla="val 6000"/>
+            </a:avLst>
+          </a:prstGeom>
+          <a:solidFill>
+            <a:schemeClr val="tx1"/>
+          </a:solidFill>
+          <a:ln w="12700">
+            <a:solidFill>
+              <a:schemeClr val="tx1"/>
+            </a:solidFill>
+            <a:prstDash val="solid"/>
+          </a:ln>
+        </p:spPr>
+      </p:sp>
+      <p:sp>
+        <p:nvSpPr>
+          <p:cNvPr id="10" name="pole-dev-raccord"/>
+          <p:cNvSpPr/>
+          <p:nvPr/>
+        </p:nvSpPr>
+        <p:spPr>
+          <a:xfrm>
+            <a:off x="6217920" y="2221992"/>
+            <a:ext cx="5394960" cy="109728"/>
+          </a:xfrm>
+          <a:prstGeom prst="rect">
+            <a:avLst/>
+          </a:prstGeom>
+          <a:solidFill>
+            <a:schemeClr val="tx1"/>
+          </a:solidFill>
+          <a:ln w="12700">
+            <a:solidFill>
+              <a:schemeClr val="tx1"/>
+            </a:solidFill>
+            <a:prstDash val="solid"/>
+          </a:ln>
+        </p:spPr>
+      </p:sp>
+      <p:sp>
+        <p:nvSpPr>
+          <p:cNvPr id="11" name="pole-dev-titre"/>
+          <p:cNvSpPr txBox="1"/>
+          <p:nvPr/>
+        </p:nvSpPr>
+        <p:spPr>
+          <a:xfrm>
+            <a:off x="6400800" y="1490472"/>
+            <a:ext cx="5029200" cy="768096"/>
+          </a:xfrm>
+          <a:prstGeom prst="rect">
+            <a:avLst/>
+          </a:prstGeom>
+          <a:noFill/>
+          <a:ln/>
+        </p:spPr>
+        <p:txBody>
+          <a:bodyPr wrap="square" lIns="0" tIns="0" rIns="0" bIns="0" rtlCol="0" anchor="ctr"/>
+          <a:lstStyle/>
+          <a:p>
+            <a:pPr indent="0" marL="0">
+              <a:buNone/>
+            </a:pPr>
+            <a:r>
+              <a:rPr lang="en-US" sz="1100" b="1" spc="200" kern="0" dirty="0">
+                <a:solidFill>
+                  <a:schemeClr val="accent1"/>
+                </a:solidFill>
+              </a:rPr>
+              <a:t>PÔLE DEV</a:t>
+            </a:r>
+            <a:endParaRPr lang="en-US" sz="1100" dirty="0"/>
+          </a:p>
+          <a:p>
+            <a:pPr indent="0" marL="0">
+              <a:buNone/>
+            </a:pPr>
+            <a:r>
+              <a:rPr lang="en-US" sz="1800" b="1" dirty="0">
+                <a:solidFill>
+                  <a:schemeClr val="bg1"/>
+                </a:solidFill>
+              </a:rPr>
+              <a:t>Felis · Martin · Matis</a:t>
+            </a:r>
+            <a:endParaRPr lang="en-US" sz="1100" dirty="0"/>
+          </a:p>
+        </p:txBody>
+      </p:sp>
+      <p:sp>
+        <p:nvSpPr>
+          <p:cNvPr id="12" name="pole-dev-texte"/>
+          <p:cNvSpPr txBox="1"/>
+          <p:nvPr/>
+        </p:nvSpPr>
+        <p:spPr>
+          <a:xfrm>
+            <a:off x="6400800" y="2468880"/>
+            <a:ext cx="5029200" cy="914400"/>
+          </a:xfrm>
+          <a:prstGeom prst="rect">
+            <a:avLst/>
+          </a:prstGeom>
+          <a:noFill/>
+          <a:ln/>
+        </p:spPr>
+        <p:txBody>
+          <a:bodyPr wrap="square" lIns="0" tIns="0" rIns="0" bIns="0" rtlCol="0" anchor="t"/>
+          <a:lstStyle/>
+          <a:p>
+            <a:pPr indent="0" marL="0">
+              <a:buNone/>
+            </a:pPr>
+            <a:r>
+              <a:rPr lang="en-US" sz="1500" dirty="0">
+                <a:solidFill>
+                  <a:schemeClr val="tx1"/>
+                </a:solidFill>
+              </a:rPr>
+              <a:t>Firmware ESP8266, API, dashboard React, IA de vision et prédictive, robot Yanshee.</a:t>
+            </a:r>
+            <a:endParaRPr lang="en-US" sz="1500" dirty="0"/>
+          </a:p>
+        </p:txBody>
+      </p:sp>
+      <p:sp>
+        <p:nvSpPr>
+          <p:cNvPr id="13" name="jour-1-tag"/>
+          <p:cNvSpPr txBox="1"/>
+          <p:nvPr/>
+        </p:nvSpPr>
+        <p:spPr>
+          <a:xfrm>
+            <a:off x="548640" y="3931920"/>
+            <a:ext cx="502920" cy="384048"/>
+          </a:xfrm>
+          <a:prstGeom prst="roundRect">
+            <a:avLst>
+              <a:gd name="adj" fmla="val 11905"/>
+            </a:avLst>
+          </a:prstGeom>
+          <a:solidFill>
+            <a:schemeClr val="tx1"/>
+          </a:solidFill>
+          <a:ln/>
+        </p:spPr>
+        <p:txBody>
+          <a:bodyPr wrap="square" lIns="0" tIns="0" rIns="0" bIns="0" rtlCol="0" anchor="ctr"/>
+          <a:lstStyle/>
+          <a:p>
+            <a:pPr algn="ctr" indent="0" marL="0">
+              <a:buNone/>
+            </a:pPr>
+            <a:r>
+              <a:rPr lang="en-US" sz="1400" b="1" dirty="0">
+                <a:solidFill>
+                  <a:schemeClr val="accent1"/>
+                </a:solidFill>
+              </a:rPr>
+              <a:t>Lun</a:t>
+            </a:r>
+            <a:endParaRPr lang="en-US" sz="1400" dirty="0"/>
+          </a:p>
+        </p:txBody>
+      </p:sp>
+      <p:sp>
+        <p:nvSpPr>
+          <p:cNvPr id="14" name="jour-1"/>
+          <p:cNvSpPr txBox="1"/>
+          <p:nvPr/>
+        </p:nvSpPr>
+        <p:spPr>
+          <a:xfrm>
+            <a:off x="1188720" y="3886200"/>
+            <a:ext cx="2103120" cy="822960"/>
+          </a:xfrm>
+          <a:prstGeom prst="rect">
+            <a:avLst/>
+          </a:prstGeom>
+          <a:noFill/>
+          <a:ln/>
+        </p:spPr>
+        <p:txBody>
+          <a:bodyPr wrap="square" lIns="0" tIns="0" rIns="0" bIns="0" rtlCol="0" anchor="t"/>
+          <a:lstStyle/>
+          <a:p>
+            <a:pPr indent="0" marL="0">
+              <a:buNone/>
+            </a:pPr>
+            <a:r>
+              <a:rPr lang="en-US" sz="1300" dirty="0">
+                <a:solidFill>
+                  <a:schemeClr val="tx1"/>
+                </a:solidFill>
+              </a:rPr>
+              <a:t>Contrat d'interface figé, plan IP, VM</a:t>
+            </a:r>
+            <a:endParaRPr lang="en-US" sz="1300" dirty="0"/>
+          </a:p>
+        </p:txBody>
+      </p:sp>
+      <p:sp>
+        <p:nvSpPr>
+          <p:cNvPr id="15" name="jour-2-tag"/>
+          <p:cNvSpPr txBox="1"/>
+          <p:nvPr/>
+        </p:nvSpPr>
+        <p:spPr>
+          <a:xfrm>
+            <a:off x="3383280" y="3931920"/>
+            <a:ext cx="502920" cy="384048"/>
+          </a:xfrm>
+          <a:prstGeom prst="roundRect">
+            <a:avLst>
+              <a:gd name="adj" fmla="val 11905"/>
+            </a:avLst>
+          </a:prstGeom>
+          <a:solidFill>
+            <a:schemeClr val="tx1"/>
+          </a:solidFill>
+          <a:ln/>
+        </p:spPr>
+        <p:txBody>
+          <a:bodyPr wrap="square" lIns="0" tIns="0" rIns="0" bIns="0" rtlCol="0" anchor="ctr"/>
+          <a:lstStyle/>
+          <a:p>
+            <a:pPr algn="ctr" indent="0" marL="0">
+              <a:buNone/>
+            </a:pPr>
+            <a:r>
+              <a:rPr lang="en-US" sz="1400" b="1" dirty="0">
+                <a:solidFill>
+                  <a:schemeClr val="accent1"/>
+                </a:solidFill>
+              </a:rPr>
+              <a:t>Mar</a:t>
+            </a:r>
+            <a:endParaRPr lang="en-US" sz="1400" dirty="0"/>
+          </a:p>
+        </p:txBody>
+      </p:sp>
+      <p:sp>
+        <p:nvSpPr>
+          <p:cNvPr id="16" name="jour-2"/>
+          <p:cNvSpPr txBox="1"/>
+          <p:nvPr/>
+        </p:nvSpPr>
+        <p:spPr>
+          <a:xfrm>
+            <a:off x="4023360" y="3886200"/>
+            <a:ext cx="2103120" cy="822960"/>
+          </a:xfrm>
+          <a:prstGeom prst="rect">
+            <a:avLst/>
+          </a:prstGeom>
+          <a:noFill/>
+          <a:ln/>
+        </p:spPr>
+        <p:txBody>
+          <a:bodyPr wrap="square" lIns="0" tIns="0" rIns="0" bIns="0" rtlCol="0" anchor="t"/>
+          <a:lstStyle/>
+          <a:p>
+            <a:pPr indent="0" marL="0">
+              <a:buNone/>
+            </a:pPr>
+            <a:r>
+              <a:rPr lang="en-US" sz="1300" dirty="0">
+                <a:solidFill>
+                  <a:schemeClr val="tx1"/>
+                </a:solidFill>
+              </a:rPr>
+              <a:t>Câblage, firmware, broker, Galera, API</a:t>
+            </a:r>
+            <a:endParaRPr lang="en-US" sz="1300" dirty="0"/>
+          </a:p>
+        </p:txBody>
+      </p:sp>
+      <p:sp>
+        <p:nvSpPr>
+          <p:cNvPr id="17" name="jour-3-tag"/>
+          <p:cNvSpPr txBox="1"/>
+          <p:nvPr/>
+        </p:nvSpPr>
+        <p:spPr>
+          <a:xfrm>
+            <a:off x="6217920" y="3931920"/>
+            <a:ext cx="502920" cy="384048"/>
+          </a:xfrm>
+          <a:prstGeom prst="roundRect">
+            <a:avLst>
+              <a:gd name="adj" fmla="val 11905"/>
+            </a:avLst>
+          </a:prstGeom>
+          <a:solidFill>
+            <a:schemeClr val="tx1"/>
+          </a:solidFill>
+          <a:ln/>
+        </p:spPr>
+        <p:txBody>
+          <a:bodyPr wrap="square" lIns="0" tIns="0" rIns="0" bIns="0" rtlCol="0" anchor="ctr"/>
+          <a:lstStyle/>
+          <a:p>
+            <a:pPr algn="ctr" indent="0" marL="0">
+              <a:buNone/>
+            </a:pPr>
+            <a:r>
+              <a:rPr lang="en-US" sz="1400" b="1" dirty="0">
+                <a:solidFill>
+                  <a:schemeClr val="accent1"/>
+                </a:solidFill>
+              </a:rPr>
+              <a:t>Mer</a:t>
+            </a:r>
+            <a:endParaRPr lang="en-US" sz="1400" dirty="0"/>
+          </a:p>
+        </p:txBody>
+      </p:sp>
+      <p:sp>
+        <p:nvSpPr>
+          <p:cNvPr id="18" name="jour-3"/>
+          <p:cNvSpPr txBox="1"/>
+          <p:nvPr/>
+        </p:nvSpPr>
+        <p:spPr>
+          <a:xfrm>
+            <a:off x="6858000" y="3886200"/>
+            <a:ext cx="2103120" cy="822960"/>
+          </a:xfrm>
+          <a:prstGeom prst="rect">
+            <a:avLst/>
+          </a:prstGeom>
+          <a:noFill/>
+          <a:ln/>
+        </p:spPr>
+        <p:txBody>
+          <a:bodyPr wrap="square" lIns="0" tIns="0" rIns="0" bIns="0" rtlCol="0" anchor="t"/>
+          <a:lstStyle/>
+          <a:p>
+            <a:pPr indent="0" marL="0">
+              <a:buNone/>
+            </a:pPr>
+            <a:r>
+              <a:rPr lang="en-US" sz="1300" dirty="0">
+                <a:solidFill>
+                  <a:schemeClr val="tx1"/>
+                </a:solidFill>
+              </a:rPr>
+              <a:t>Bout en bout, IA, robot, tournage</a:t>
+            </a:r>
+            <a:endParaRPr lang="en-US" sz="1300" dirty="0"/>
+          </a:p>
+        </p:txBody>
+      </p:sp>
+      <p:sp>
+        <p:nvSpPr>
+          <p:cNvPr id="19" name="jour-4-tag"/>
+          <p:cNvSpPr txBox="1"/>
+          <p:nvPr/>
+        </p:nvSpPr>
+        <p:spPr>
+          <a:xfrm>
+            <a:off x="9052560" y="3931920"/>
+            <a:ext cx="502920" cy="384048"/>
+          </a:xfrm>
+          <a:prstGeom prst="roundRect">
+            <a:avLst>
+              <a:gd name="adj" fmla="val 11905"/>
+            </a:avLst>
+          </a:prstGeom>
+          <a:solidFill>
+            <a:schemeClr val="tx1"/>
+          </a:solidFill>
+          <a:ln/>
+        </p:spPr>
+        <p:txBody>
+          <a:bodyPr wrap="square" lIns="0" tIns="0" rIns="0" bIns="0" rtlCol="0" anchor="ctr"/>
+          <a:lstStyle/>
+          <a:p>
+            <a:pPr algn="ctr" indent="0" marL="0">
+              <a:buNone/>
+            </a:pPr>
+            <a:r>
+              <a:rPr lang="en-US" sz="1400" b="1" dirty="0">
+                <a:solidFill>
+                  <a:schemeClr val="accent1"/>
+                </a:solidFill>
+              </a:rPr>
+              <a:t>Jeu</a:t>
+            </a:r>
+            <a:endParaRPr lang="en-US" sz="1400" dirty="0"/>
+          </a:p>
+        </p:txBody>
+      </p:sp>
+      <p:sp>
+        <p:nvSpPr>
+          <p:cNvPr id="20" name="jour-4"/>
+          <p:cNvSpPr txBox="1"/>
+          <p:nvPr/>
+        </p:nvSpPr>
+        <p:spPr>
+          <a:xfrm>
+            <a:off x="9692640" y="3886200"/>
+            <a:ext cx="2103120" cy="822960"/>
+          </a:xfrm>
+          <a:prstGeom prst="rect">
+            <a:avLst/>
+          </a:prstGeom>
+          <a:noFill/>
+          <a:ln/>
+        </p:spPr>
+        <p:txBody>
+          <a:bodyPr wrap="square" lIns="0" tIns="0" rIns="0" bIns="0" rtlCol="0" anchor="t"/>
+          <a:lstStyle/>
+          <a:p>
+            <a:pPr indent="0" marL="0">
+              <a:buNone/>
+            </a:pPr>
+            <a:r>
+              <a:rPr lang="en-US" sz="1300" dirty="0">
+                <a:solidFill>
+                  <a:schemeClr val="tx1"/>
+                </a:solidFill>
+              </a:rPr>
+              <a:t>TLS seul, secrets, audit, pentest</a:t>
+            </a:r>
+            <a:endParaRPr lang="en-US" sz="1300" dirty="0"/>
+          </a:p>
+        </p:txBody>
+      </p:sp>
+      <p:sp>
+        <p:nvSpPr>
+          <p:cNvPr id="21" name="methode-fond"/>
+          <p:cNvSpPr/>
+          <p:nvPr/>
+        </p:nvSpPr>
+        <p:spPr>
+          <a:xfrm>
+            <a:off x="548640" y="5074920"/>
+            <a:ext cx="11064240" cy="640080"/>
+          </a:xfrm>
+          <a:prstGeom prst="roundRect">
+            <a:avLst>
+              <a:gd name="adj" fmla="val 7143"/>
+            </a:avLst>
+          </a:prstGeom>
+          <a:solidFill>
+            <a:srgbClr val="F1F4F6"/>
+          </a:solidFill>
+          <a:ln w="12700">
+            <a:solidFill>
+              <a:srgbClr val="F1F4F6"/>
+            </a:solidFill>
+            <a:prstDash val="solid"/>
+          </a:ln>
+        </p:spPr>
+      </p:sp>
+      <p:sp>
+        <p:nvSpPr>
+          <p:cNvPr id="22" name="methode"/>
+          <p:cNvSpPr txBox="1"/>
+          <p:nvPr/>
+        </p:nvSpPr>
+        <p:spPr>
+          <a:xfrm>
+            <a:off x="777240" y="5074920"/>
+            <a:ext cx="10607040" cy="640080"/>
+          </a:xfrm>
+          <a:prstGeom prst="rect">
+            <a:avLst/>
+          </a:prstGeom>
+          <a:noFill/>
+          <a:ln/>
+        </p:spPr>
+        <p:txBody>
+          <a:bodyPr wrap="square" lIns="0" tIns="0" rIns="0" bIns="0" rtlCol="0" anchor="ctr"/>
+          <a:lstStyle/>
+          <a:p>
+            <a:pPr indent="0" marL="0">
+              <a:buNone/>
+            </a:pPr>
+            <a:r>
+              <a:rPr lang="en-US" sz="1400" b="1" dirty="0">
+                <a:solidFill>
+                  <a:schemeClr val="tx1"/>
+                </a:solidFill>
+              </a:rPr>
+              <a:t>Méthode : </a:t>
+            </a:r>
+            <a:pPr indent="0" marL="0">
+              <a:buNone/>
+            </a:pPr>
+            <a:r>
+              <a:rPr lang="en-US" sz="1400" dirty="0">
+                <a:solidFill>
+                  <a:schemeClr val="tx1"/>
+                </a:solidFill>
+              </a:rPr>
+              <a:t>Jira pour les tâches · une branche par brique, fusion par pull request · commits sémantiques · tests automatisés sur l'API et les IA</a:t>
+            </a:r>
+            <a:endParaRPr lang="en-US" sz="1400" dirty="0"/>
+          </a:p>
+        </p:txBody>
+      </p:sp>
+      <p:sp>
+        <p:nvSpPr>
+          <p:cNvPr id="25" name="Slide Number Placeholder 0"/>
+          <p:cNvSpPr>
+            <a:spLocks noGrp="1"/>
+          </p:cNvSpPr>
+          <p:nvPr>
+            <p:ph type="sldNum" sz="quarter" idx="4294967295"/>
+          </p:nvPr>
+        </p:nvSpPr>
+        <p:spPr>
+          <a:xfrm>
+            <a:off x="11247120" y="6400800"/>
+            <a:ext cx="457200" cy="274320"/>
+          </a:xfrm>
+          <a:prstGeom prst="rect">
+            <a:avLst/>
+          </a:prstGeom>
+          <a:extLst>
+            <a:ext uri="{C572A759-6A51-4108-AA02-DFA0A04FC94B}">
+              <ma14:wrappingTextBoxFlag xmlns:ma14="http://schemas.microsoft.com/office/mac/drawingml/2011/main" val="0"/>
+            </a:ext>
+          </a:extLst>
+        </p:spPr>
+        <p:txBody>
+          <a:bodyPr/>
+          <a:lstStyle>
+            <a:lvl1pPr>
+              <a:defRPr sz="1000">
+                <a:solidFill>
+                  <a:srgbClr val="6B7886"/>
+                </a:solidFill>
+              </a:defRPr>
+            </a:lvl1pPr>
+          </a:lstStyle>
+          <a:p>
+            <a:pPr algn="r"/>
+            <a:fld id="{F7021451-1387-4CA6-816F-3879F97B5CBC}" type="slidenum">
+              <a:rPr b="0" lang="en-US"/>
+              <a:t>14</a:t>
+            </a:fld>
+            <a:endParaRPr lang="en-US"/>
+          </a:p>
+        </p:txBody>
+      </p:sp>
+    </p:spTree>
+  </p:cSld>
+  <p:clrMapOvr>
+    <a:masterClrMapping/>
+  </p:clrMapOvr>
+</p:sld>
+</file>
+
+<file path=ppt/slides/slide15.xml><?xml version="1.0" encoding="utf-8"?>
+<p:sld xmlns:a="http://schemas.openxmlformats.org/drawingml/2006/main" xmlns:r="http://schemas.openxmlformats.org/officeDocument/2006/relationships" xmlns:p="http://schemas.openxmlformats.org/presentationml/2006/main">
+  <p:cSld name="Slide 15">
+    <p:spTree>
+      <p:nvGrpSpPr>
+        <p:cNvPr id="1" name=""/>
+        <p:cNvGrpSpPr/>
+        <p:nvPr/>
+      </p:nvGrpSpPr>
+      <p:grpSpPr>
+        <a:xfrm>
+          <a:off x="0" y="0"/>
+          <a:ext cx="0" cy="0"/>
+          <a:chOff x="0" y="0"/>
+          <a:chExt cx="0" cy="0"/>
+        </a:xfrm>
+      </p:grpSpPr>
+      <p:sp>
+        <p:nvSpPr>
+          <p:cNvPr id="2" name="Text 0"/>
+          <p:cNvSpPr/>
+          <p:nvPr>
             <p:ph idx="100" type="body" hasCustomPrompt="1"/>
           </p:nvPr>
         </p:nvSpPr>
@@ -6743,7 +7265,7 @@
       </p:sp>
       <p:pic>
         <p:nvPicPr>
-          <p:cNvPr id="5" name="logo-bouclier-fin" descr="/Users/felis/Documents/Workspace/Ecole/Master/Workshop-2026/Sentinel-X-Yanshee-defender-3000/livrables/sources/pptx/shield.png">    </p:cNvPr>
+          <p:cNvPr id="5" name="logo-bouclier-fin" descr="/Users/felis/Documents/Workspace/Ecole/Master/Workshop-2026/Interne-G7/sources/pptx/shield.png">    </p:cNvPr>
           <p:cNvPicPr>
             <a:picLocks noChangeAspect="1"/>
           </p:cNvPicPr>
@@ -9423,96 +9945,6 @@
         <p:spPr>
           <a:xfrm>
             <a:off x="1234440" y="4526280"/>
-            <a:ext cx="4663440" cy="1325880"/>
-          </a:xfrm>
-          <a:prstGeom prst="rect">
-            <a:avLst/>
-          </a:prstGeom>
-          <a:noFill/>
-          <a:ln/>
-        </p:spPr>
-        <p:txBody>
-          <a:bodyPr wrap="square" lIns="0" tIns="0" rIns="0" bIns="0" rtlCol="0" anchor="t"/>
-          <a:lstStyle/>
-          <a:p>
-            <a:pPr indent="0" marL="0">
-              <a:buNone/>
-            </a:pPr>
-            <a:r>
-              <a:rPr lang="en-US" sz="1800" b="1" dirty="0">
-                <a:solidFill>
-                  <a:schemeClr val="accent1"/>
-                </a:solidFill>
-              </a:rPr>
-              <a:t>Chiffrement prouvé</a:t>
-            </a:r>
-            <a:endParaRPr lang="en-US" sz="1800" dirty="0"/>
-          </a:p>
-          <a:p>
-            <a:pPr indent="0" marL="0">
-              <a:buNone/>
-            </a:pPr>
-            <a:r>
-              <a:rPr lang="en-US" sz="1400" dirty="0">
-                <a:solidFill>
-                  <a:schemeClr val="bg1"/>
-                </a:solidFill>
-              </a:rPr>
-              <a:t>Wireshark sur le flux MQTT : trafic illisible.</a:t>
-            </a:r>
-            <a:endParaRPr lang="en-US" sz="1800" dirty="0"/>
-          </a:p>
-        </p:txBody>
-      </p:sp>
-      <p:sp>
-        <p:nvSpPr>
-          <p:cNvPr id="13" name="etape-6-num"/>
-          <p:cNvSpPr txBox="1"/>
-          <p:nvPr/>
-        </p:nvSpPr>
-        <p:spPr>
-          <a:xfrm>
-            <a:off x="6172200" y="4572000"/>
-            <a:ext cx="502920" cy="384048"/>
-          </a:xfrm>
-          <a:prstGeom prst="roundRect">
-            <a:avLst>
-              <a:gd name="adj" fmla="val 11905"/>
-            </a:avLst>
-          </a:prstGeom>
-          <a:solidFill>
-            <a:schemeClr val="accent1"/>
-          </a:solidFill>
-          <a:ln/>
-        </p:spPr>
-        <p:txBody>
-          <a:bodyPr wrap="square" lIns="0" tIns="0" rIns="0" bIns="0" rtlCol="0" anchor="ctr"/>
-          <a:lstStyle/>
-          <a:p>
-            <a:pPr algn="ctr" indent="0" marL="0">
-              <a:buNone/>
-            </a:pPr>
-            <a:r>
-              <a:rPr lang="en-US" sz="1400" b="1" dirty="0">
-                <a:solidFill>
-                  <a:schemeClr val="tx1"/>
-                </a:solidFill>
-              </a:rPr>
-              <a:t>6</a:t>
-            </a:r>
-            <a:endParaRPr lang="en-US" sz="1400" dirty="0"/>
-          </a:p>
-        </p:txBody>
-      </p:sp>
-      <p:sp>
-        <p:nvSpPr>
-          <p:cNvPr id="14" name="etape-6"/>
-          <p:cNvSpPr txBox="1"/>
-          <p:nvPr/>
-        </p:nvSpPr>
-        <p:spPr>
-          <a:xfrm>
-            <a:off x="6858000" y="4526280"/>
             <a:ext cx="4663440" cy="1325880"/>
           </a:xfrm>
           <a:prstGeom prst="rect">
@@ -12112,7 +12544,7 @@
       </p:sp>
       <p:pic>
         <p:nvPicPr>
-          <p:cNvPr id="3" name="graphique-scenario" descr="/Users/felis/Documents/Workspace/Ecole/Master/Workshop-2026/Sentinel-X-Yanshee-defender-3000/livrables/sources/pptx/scenario_demo_ia.png">    </p:cNvPr>
+          <p:cNvPr id="3" name="graphique-scenario" descr="/Users/felis/Documents/Workspace/Ecole/Master/Workshop-2026/Interne-G7/sources/pptx/scenario_demo_ia.png">    </p:cNvPr>
           <p:cNvPicPr>
             <a:picLocks noChangeAspect="1"/>
           </p:cNvPicPr>
